--- a/output/slide_v1.pptx
+++ b/output/slide_v1.pptx
@@ -10,8 +10,8 @@
   <p:notesMasterIdLst>
     <p:notesMasterId r:id="rId3"/>
   </p:notesMasterIdLst>
-  <p:sldSz cx="9144000" cy="5715000"/>
-  <p:notesSz cx="5715000" cy="9144000"/>
+  <p:sldSz cx="9144000" cy="5143500"/>
+  <p:notesSz cx="5143500" cy="9144000"/>
   <p:defaultTextStyle>
     <a:lvl1pPr marL="0" algn="l" defTabSz="914400" rtl="0" eaLnBrk="1" latinLnBrk="0" hangingPunct="1">
       <a:defRPr sz="1800" kern="1200">
@@ -883,8 +883,8 @@
         </p:nvSpPr>
         <p:spPr>
           <a:xfrm>
-            <a:off x="457200" y="365760"/>
-            <a:ext cx="8229600" cy="640080"/>
+            <a:off x="457200" y="182880"/>
+            <a:ext cx="8229600" cy="822960"/>
           </a:xfrm>
           <a:prstGeom prst="rect">
             <a:avLst/>
@@ -893,10 +893,13 @@
           <a:ln/>
         </p:spPr>
         <p:txBody>
-          <a:bodyPr wrap="square" lIns="0" tIns="0" rIns="0" bIns="0" rtlCol="0" anchor="t"/>
+          <a:bodyPr wrap="square" lIns="0" tIns="0" rIns="0" bIns="0" rtlCol="0" anchor="ctr"/>
           <a:lstStyle/>
           <a:p>
-            <a:pPr algn="l" indent="0" marL="0">
+            <a:pPr indent="0" marL="0">
+              <a:lnSpc>
+                <a:spcPct val="110000"/>
+              </a:lnSpc>
               <a:buNone/>
             </a:pPr>
             <a:r>
@@ -908,7 +911,27 @@
                 <a:ea typeface="Georgia" pitchFamily="34" charset="-122"/>
                 <a:cs typeface="Georgia" pitchFamily="34" charset="-120"/>
               </a:rPr>
-              <a:t>The Netherlands aims to become Europe's green hydrogen hub, scaling from 500 MW to 3–4 GW by 2030</a:t>
+              <a:t>Blue and Green hydrogen are two low-carbon production</a:t>
+            </a:r>
+            <a:endParaRPr lang="en-US" sz="2200" dirty="0"/>
+          </a:p>
+          <a:p>
+            <a:pPr indent="0" marL="0">
+              <a:lnSpc>
+                <a:spcPct val="110000"/>
+              </a:lnSpc>
+              <a:buNone/>
+            </a:pPr>
+            <a:r>
+              <a:rPr lang="en-US" sz="2200" b="1" dirty="0">
+                <a:solidFill>
+                  <a:srgbClr val="000000"/>
+                </a:solidFill>
+                <a:latin typeface="Georgia" pitchFamily="34" charset="0"/>
+                <a:ea typeface="Georgia" pitchFamily="34" charset="-122"/>
+                <a:cs typeface="Georgia" pitchFamily="34" charset="-120"/>
+              </a:rPr>
+              <a:t>methods of H2 with the highest future potential</a:t>
             </a:r>
             <a:endParaRPr lang="en-US" sz="2200" dirty="0"/>
           </a:p>
@@ -922,8 +945,8 @@
         </p:nvSpPr>
         <p:spPr>
           <a:xfrm>
-            <a:off x="457200" y="1051560"/>
-            <a:ext cx="8229600" cy="228600"/>
+            <a:off x="3200400" y="1234440"/>
+            <a:ext cx="2743200" cy="274320"/>
           </a:xfrm>
           <a:prstGeom prst="rect">
             <a:avLst/>
@@ -932,22 +955,22 @@
           <a:ln/>
         </p:spPr>
         <p:txBody>
-          <a:bodyPr wrap="square" lIns="0" tIns="0" rIns="0" bIns="0" rtlCol="0" anchor="t"/>
+          <a:bodyPr wrap="square" rtlCol="0" anchor="ctr"/>
           <a:lstStyle/>
           <a:p>
-            <a:pPr algn="l" indent="0" marL="0">
+            <a:pPr algn="ctr" indent="0" marL="0">
               <a:buNone/>
             </a:pPr>
             <a:r>
-              <a:rPr lang="en-US" sz="1100" dirty="0">
+              <a:rPr lang="en-US" sz="1100" b="1" dirty="0">
                 <a:solidFill>
-                  <a:srgbClr val="666666"/>
+                  <a:srgbClr val="333333"/>
                 </a:solidFill>
                 <a:latin typeface="Calibri" pitchFamily="34" charset="0"/>
                 <a:ea typeface="Calibri" pitchFamily="34" charset="-122"/>
                 <a:cs typeface="Calibri" pitchFamily="34" charset="-120"/>
               </a:rPr>
-              <a:t>Dutch National Hydrogen Strategy timeline and key metrics (2020–2035)</a:t>
+              <a:t>Low-carbon H2</a:t>
             </a:r>
             <a:endParaRPr lang="en-US" sz="1100" dirty="0"/>
           </a:p>
@@ -961,7 +984,7 @@
         </p:nvSpPr>
         <p:spPr>
           <a:xfrm>
-            <a:off x="457200" y="1371600"/>
+            <a:off x="457200" y="1097280"/>
             <a:ext cx="8229600" cy="0"/>
           </a:xfrm>
           <a:prstGeom prst="line">
@@ -970,724 +993,11 @@
           <a:noFill/>
           <a:ln w="12700">
             <a:solidFill>
-              <a:srgbClr val="C00000"/>
+              <a:srgbClr val="333333"/>
             </a:solidFill>
             <a:prstDash val="solid"/>
           </a:ln>
         </p:spPr>
-      </p:sp>
-      <p:sp>
-        <p:nvSpPr>
-          <p:cNvPr id="5" name="Shape 3"/>
-          <p:cNvSpPr/>
-          <p:nvPr/>
-        </p:nvSpPr>
-        <p:spPr>
-          <a:xfrm>
-            <a:off x="731520" y="2377440"/>
-            <a:ext cx="7680960" cy="0"/>
-          </a:xfrm>
-          <a:prstGeom prst="line">
-            <a:avLst/>
-          </a:prstGeom>
-          <a:noFill/>
-          <a:ln w="19050">
-            <a:solidFill>
-              <a:srgbClr val="0C2340"/>
-            </a:solidFill>
-            <a:prstDash val="solid"/>
-          </a:ln>
-        </p:spPr>
-      </p:sp>
-      <p:sp>
-        <p:nvSpPr>
-          <p:cNvPr id="6" name="Shape 4"/>
-          <p:cNvSpPr/>
-          <p:nvPr/>
-        </p:nvSpPr>
-        <p:spPr>
-          <a:xfrm>
-            <a:off x="594360" y="2240280"/>
-            <a:ext cx="274320" cy="274320"/>
-          </a:xfrm>
-          <a:prstGeom prst="ellipse">
-            <a:avLst/>
-          </a:prstGeom>
-          <a:solidFill>
-            <a:srgbClr val="0C2340"/>
-          </a:solidFill>
-          <a:ln/>
-        </p:spPr>
-      </p:sp>
-      <p:sp>
-        <p:nvSpPr>
-          <p:cNvPr id="7" name="Text 5"/>
-          <p:cNvSpPr/>
-          <p:nvPr/>
-        </p:nvSpPr>
-        <p:spPr>
-          <a:xfrm>
-            <a:off x="594360" y="2240280"/>
-            <a:ext cx="274320" cy="274320"/>
-          </a:xfrm>
-          <a:prstGeom prst="rect">
-            <a:avLst/>
-          </a:prstGeom>
-          <a:noFill/>
-          <a:ln/>
-        </p:spPr>
-        <p:txBody>
-          <a:bodyPr wrap="square" lIns="0" tIns="0" rIns="0" bIns="0" rtlCol="0" anchor="ctr"/>
-          <a:lstStyle/>
-          <a:p>
-            <a:pPr algn="ctr" indent="0" marL="0">
-              <a:buNone/>
-            </a:pPr>
-            <a:r>
-              <a:rPr lang="en-US" sz="700" dirty="0">
-                <a:solidFill>
-                  <a:srgbClr val="FFFFFF"/>
-                </a:solidFill>
-                <a:latin typeface="Calibri" pitchFamily="34" charset="0"/>
-                <a:ea typeface="Calibri" pitchFamily="34" charset="-122"/>
-                <a:cs typeface="Calibri" pitchFamily="34" charset="-120"/>
-              </a:rPr>
-              <a:t>2020</a:t>
-            </a:r>
-            <a:endParaRPr lang="en-US" sz="700" dirty="0"/>
-          </a:p>
-        </p:txBody>
-      </p:sp>
-      <p:sp>
-        <p:nvSpPr>
-          <p:cNvPr id="8" name="Text 6"/>
-          <p:cNvSpPr/>
-          <p:nvPr/>
-        </p:nvSpPr>
-        <p:spPr>
-          <a:xfrm>
-            <a:off x="137160" y="1737360"/>
-            <a:ext cx="1188720" cy="411480"/>
-          </a:xfrm>
-          <a:prstGeom prst="rect">
-            <a:avLst/>
-          </a:prstGeom>
-          <a:noFill/>
-          <a:ln/>
-        </p:spPr>
-        <p:txBody>
-          <a:bodyPr wrap="square" lIns="0" tIns="0" rIns="0" bIns="0" rtlCol="0" anchor="b"/>
-          <a:lstStyle/>
-          <a:p>
-            <a:pPr algn="ctr" indent="0" marL="0">
-              <a:buNone/>
-            </a:pPr>
-            <a:r>
-              <a:rPr lang="en-US" sz="850" dirty="0">
-                <a:solidFill>
-                  <a:srgbClr val="404040"/>
-                </a:solidFill>
-                <a:latin typeface="Calibri" pitchFamily="34" charset="0"/>
-                <a:ea typeface="Calibri" pitchFamily="34" charset="-122"/>
-                <a:cs typeface="Calibri" pitchFamily="34" charset="-120"/>
-              </a:rPr>
-              <a:t>National Hydrogen</a:t>
-            </a:r>
-            <a:endParaRPr lang="en-US" sz="850" dirty="0"/>
-          </a:p>
-          <a:p>
-            <a:pPr algn="ctr" indent="0" marL="0">
-              <a:buNone/>
-            </a:pPr>
-            <a:r>
-              <a:rPr lang="en-US" sz="850" dirty="0">
-                <a:solidFill>
-                  <a:srgbClr val="404040"/>
-                </a:solidFill>
-                <a:latin typeface="Calibri" pitchFamily="34" charset="0"/>
-                <a:ea typeface="Calibri" pitchFamily="34" charset="-122"/>
-                <a:cs typeface="Calibri" pitchFamily="34" charset="-120"/>
-              </a:rPr>
-              <a:t>Strategy published</a:t>
-            </a:r>
-            <a:endParaRPr lang="en-US" sz="850" dirty="0"/>
-          </a:p>
-        </p:txBody>
-      </p:sp>
-      <p:sp>
-        <p:nvSpPr>
-          <p:cNvPr id="9" name="Shape 7"/>
-          <p:cNvSpPr/>
-          <p:nvPr/>
-        </p:nvSpPr>
-        <p:spPr>
-          <a:xfrm>
-            <a:off x="2130552" y="2240280"/>
-            <a:ext cx="274320" cy="274320"/>
-          </a:xfrm>
-          <a:prstGeom prst="ellipse">
-            <a:avLst/>
-          </a:prstGeom>
-          <a:solidFill>
-            <a:srgbClr val="0C2340"/>
-          </a:solidFill>
-          <a:ln/>
-        </p:spPr>
-      </p:sp>
-      <p:sp>
-        <p:nvSpPr>
-          <p:cNvPr id="10" name="Text 8"/>
-          <p:cNvSpPr/>
-          <p:nvPr/>
-        </p:nvSpPr>
-        <p:spPr>
-          <a:xfrm>
-            <a:off x="2130552" y="2240280"/>
-            <a:ext cx="274320" cy="274320"/>
-          </a:xfrm>
-          <a:prstGeom prst="rect">
-            <a:avLst/>
-          </a:prstGeom>
-          <a:noFill/>
-          <a:ln/>
-        </p:spPr>
-        <p:txBody>
-          <a:bodyPr wrap="square" lIns="0" tIns="0" rIns="0" bIns="0" rtlCol="0" anchor="ctr"/>
-          <a:lstStyle/>
-          <a:p>
-            <a:pPr algn="ctr" indent="0" marL="0">
-              <a:buNone/>
-            </a:pPr>
-            <a:r>
-              <a:rPr lang="en-US" sz="700" dirty="0">
-                <a:solidFill>
-                  <a:srgbClr val="FFFFFF"/>
-                </a:solidFill>
-                <a:latin typeface="Calibri" pitchFamily="34" charset="0"/>
-                <a:ea typeface="Calibri" pitchFamily="34" charset="-122"/>
-                <a:cs typeface="Calibri" pitchFamily="34" charset="-120"/>
-              </a:rPr>
-              <a:t>2022</a:t>
-            </a:r>
-            <a:endParaRPr lang="en-US" sz="700" dirty="0"/>
-          </a:p>
-        </p:txBody>
-      </p:sp>
-      <p:sp>
-        <p:nvSpPr>
-          <p:cNvPr id="11" name="Text 9"/>
-          <p:cNvSpPr/>
-          <p:nvPr/>
-        </p:nvSpPr>
-        <p:spPr>
-          <a:xfrm>
-            <a:off x="1673352" y="2606040"/>
-            <a:ext cx="1188720" cy="411480"/>
-          </a:xfrm>
-          <a:prstGeom prst="rect">
-            <a:avLst/>
-          </a:prstGeom>
-          <a:noFill/>
-          <a:ln/>
-        </p:spPr>
-        <p:txBody>
-          <a:bodyPr wrap="square" lIns="0" tIns="0" rIns="0" bIns="0" rtlCol="0" anchor="t"/>
-          <a:lstStyle/>
-          <a:p>
-            <a:pPr algn="ctr" indent="0" marL="0">
-              <a:buNone/>
-            </a:pPr>
-            <a:r>
-              <a:rPr lang="en-US" sz="850" dirty="0">
-                <a:solidFill>
-                  <a:srgbClr val="404040"/>
-                </a:solidFill>
-                <a:latin typeface="Calibri" pitchFamily="34" charset="0"/>
-                <a:ea typeface="Calibri" pitchFamily="34" charset="-122"/>
-                <a:cs typeface="Calibri" pitchFamily="34" charset="-120"/>
-              </a:rPr>
-              <a:t>REPowerEU plan</a:t>
-            </a:r>
-            <a:endParaRPr lang="en-US" sz="850" dirty="0"/>
-          </a:p>
-          <a:p>
-            <a:pPr algn="ctr" indent="0" marL="0">
-              <a:buNone/>
-            </a:pPr>
-            <a:r>
-              <a:rPr lang="en-US" sz="850" dirty="0">
-                <a:solidFill>
-                  <a:srgbClr val="404040"/>
-                </a:solidFill>
-                <a:latin typeface="Calibri" pitchFamily="34" charset="0"/>
-                <a:ea typeface="Calibri" pitchFamily="34" charset="-122"/>
-                <a:cs typeface="Calibri" pitchFamily="34" charset="-120"/>
-              </a:rPr>
-              <a:t>accelerates ambitions</a:t>
-            </a:r>
-            <a:endParaRPr lang="en-US" sz="850" dirty="0"/>
-          </a:p>
-        </p:txBody>
-      </p:sp>
-      <p:sp>
-        <p:nvSpPr>
-          <p:cNvPr id="12" name="Shape 10"/>
-          <p:cNvSpPr/>
-          <p:nvPr/>
-        </p:nvSpPr>
-        <p:spPr>
-          <a:xfrm>
-            <a:off x="3666744" y="2240280"/>
-            <a:ext cx="274320" cy="274320"/>
-          </a:xfrm>
-          <a:prstGeom prst="ellipse">
-            <a:avLst/>
-          </a:prstGeom>
-          <a:solidFill>
-            <a:srgbClr val="0C2340"/>
-          </a:solidFill>
-          <a:ln/>
-        </p:spPr>
-      </p:sp>
-      <p:sp>
-        <p:nvSpPr>
-          <p:cNvPr id="13" name="Text 11"/>
-          <p:cNvSpPr/>
-          <p:nvPr/>
-        </p:nvSpPr>
-        <p:spPr>
-          <a:xfrm>
-            <a:off x="3666744" y="2240280"/>
-            <a:ext cx="274320" cy="274320"/>
-          </a:xfrm>
-          <a:prstGeom prst="rect">
-            <a:avLst/>
-          </a:prstGeom>
-          <a:noFill/>
-          <a:ln/>
-        </p:spPr>
-        <p:txBody>
-          <a:bodyPr wrap="square" lIns="0" tIns="0" rIns="0" bIns="0" rtlCol="0" anchor="ctr"/>
-          <a:lstStyle/>
-          <a:p>
-            <a:pPr algn="ctr" indent="0" marL="0">
-              <a:buNone/>
-            </a:pPr>
-            <a:r>
-              <a:rPr lang="en-US" sz="700" dirty="0">
-                <a:solidFill>
-                  <a:srgbClr val="FFFFFF"/>
-                </a:solidFill>
-                <a:latin typeface="Calibri" pitchFamily="34" charset="0"/>
-                <a:ea typeface="Calibri" pitchFamily="34" charset="-122"/>
-                <a:cs typeface="Calibri" pitchFamily="34" charset="-120"/>
-              </a:rPr>
-              <a:t>2025</a:t>
-            </a:r>
-            <a:endParaRPr lang="en-US" sz="700" dirty="0"/>
-          </a:p>
-        </p:txBody>
-      </p:sp>
-      <p:sp>
-        <p:nvSpPr>
-          <p:cNvPr id="14" name="Text 12"/>
-          <p:cNvSpPr/>
-          <p:nvPr/>
-        </p:nvSpPr>
-        <p:spPr>
-          <a:xfrm>
-            <a:off x="3209544" y="1737360"/>
-            <a:ext cx="1188720" cy="411480"/>
-          </a:xfrm>
-          <a:prstGeom prst="rect">
-            <a:avLst/>
-          </a:prstGeom>
-          <a:noFill/>
-          <a:ln/>
-        </p:spPr>
-        <p:txBody>
-          <a:bodyPr wrap="square" lIns="0" tIns="0" rIns="0" bIns="0" rtlCol="0" anchor="b"/>
-          <a:lstStyle/>
-          <a:p>
-            <a:pPr algn="ctr" indent="0" marL="0">
-              <a:buNone/>
-            </a:pPr>
-            <a:r>
-              <a:rPr lang="en-US" sz="850" dirty="0">
-                <a:solidFill>
-                  <a:srgbClr val="404040"/>
-                </a:solidFill>
-                <a:latin typeface="Calibri" pitchFamily="34" charset="0"/>
-                <a:ea typeface="Calibri" pitchFamily="34" charset="-122"/>
-                <a:cs typeface="Calibri" pitchFamily="34" charset="-120"/>
-              </a:rPr>
-              <a:t>First green H2</a:t>
-            </a:r>
-            <a:endParaRPr lang="en-US" sz="850" dirty="0"/>
-          </a:p>
-          <a:p>
-            <a:pPr algn="ctr" indent="0" marL="0">
-              <a:buNone/>
-            </a:pPr>
-            <a:r>
-              <a:rPr lang="en-US" sz="850" dirty="0">
-                <a:solidFill>
-                  <a:srgbClr val="404040"/>
-                </a:solidFill>
-                <a:latin typeface="Calibri" pitchFamily="34" charset="0"/>
-                <a:ea typeface="Calibri" pitchFamily="34" charset="-122"/>
-                <a:cs typeface="Calibri" pitchFamily="34" charset="-120"/>
-              </a:rPr>
-              <a:t>hubs operational</a:t>
-            </a:r>
-            <a:endParaRPr lang="en-US" sz="850" dirty="0"/>
-          </a:p>
-        </p:txBody>
-      </p:sp>
-      <p:sp>
-        <p:nvSpPr>
-          <p:cNvPr id="15" name="Shape 13"/>
-          <p:cNvSpPr/>
-          <p:nvPr/>
-        </p:nvSpPr>
-        <p:spPr>
-          <a:xfrm>
-            <a:off x="5202936" y="2240280"/>
-            <a:ext cx="274320" cy="274320"/>
-          </a:xfrm>
-          <a:prstGeom prst="ellipse">
-            <a:avLst/>
-          </a:prstGeom>
-          <a:solidFill>
-            <a:srgbClr val="0C2340"/>
-          </a:solidFill>
-          <a:ln/>
-        </p:spPr>
-      </p:sp>
-      <p:sp>
-        <p:nvSpPr>
-          <p:cNvPr id="16" name="Text 14"/>
-          <p:cNvSpPr/>
-          <p:nvPr/>
-        </p:nvSpPr>
-        <p:spPr>
-          <a:xfrm>
-            <a:off x="5202936" y="2240280"/>
-            <a:ext cx="274320" cy="274320"/>
-          </a:xfrm>
-          <a:prstGeom prst="rect">
-            <a:avLst/>
-          </a:prstGeom>
-          <a:noFill/>
-          <a:ln/>
-        </p:spPr>
-        <p:txBody>
-          <a:bodyPr wrap="square" lIns="0" tIns="0" rIns="0" bIns="0" rtlCol="0" anchor="ctr"/>
-          <a:lstStyle/>
-          <a:p>
-            <a:pPr algn="ctr" indent="0" marL="0">
-              <a:buNone/>
-            </a:pPr>
-            <a:r>
-              <a:rPr lang="en-US" sz="700" dirty="0">
-                <a:solidFill>
-                  <a:srgbClr val="FFFFFF"/>
-                </a:solidFill>
-                <a:latin typeface="Calibri" pitchFamily="34" charset="0"/>
-                <a:ea typeface="Calibri" pitchFamily="34" charset="-122"/>
-                <a:cs typeface="Calibri" pitchFamily="34" charset="-120"/>
-              </a:rPr>
-              <a:t>2028</a:t>
-            </a:r>
-            <a:endParaRPr lang="en-US" sz="700" dirty="0"/>
-          </a:p>
-        </p:txBody>
-      </p:sp>
-      <p:sp>
-        <p:nvSpPr>
-          <p:cNvPr id="17" name="Text 15"/>
-          <p:cNvSpPr/>
-          <p:nvPr/>
-        </p:nvSpPr>
-        <p:spPr>
-          <a:xfrm>
-            <a:off x="4745736" y="2606040"/>
-            <a:ext cx="1188720" cy="411480"/>
-          </a:xfrm>
-          <a:prstGeom prst="rect">
-            <a:avLst/>
-          </a:prstGeom>
-          <a:noFill/>
-          <a:ln/>
-        </p:spPr>
-        <p:txBody>
-          <a:bodyPr wrap="square" lIns="0" tIns="0" rIns="0" bIns="0" rtlCol="0" anchor="t"/>
-          <a:lstStyle/>
-          <a:p>
-            <a:pPr algn="ctr" indent="0" marL="0">
-              <a:buNone/>
-            </a:pPr>
-            <a:r>
-              <a:rPr lang="en-US" sz="850" dirty="0">
-                <a:solidFill>
-                  <a:srgbClr val="404040"/>
-                </a:solidFill>
-                <a:latin typeface="Calibri" pitchFamily="34" charset="0"/>
-                <a:ea typeface="Calibri" pitchFamily="34" charset="-122"/>
-                <a:cs typeface="Calibri" pitchFamily="34" charset="-120"/>
-              </a:rPr>
-              <a:t>HyNetwork backbone</a:t>
-            </a:r>
-            <a:endParaRPr lang="en-US" sz="850" dirty="0"/>
-          </a:p>
-          <a:p>
-            <a:pPr algn="ctr" indent="0" marL="0">
-              <a:buNone/>
-            </a:pPr>
-            <a:r>
-              <a:rPr lang="en-US" sz="850" dirty="0">
-                <a:solidFill>
-                  <a:srgbClr val="404040"/>
-                </a:solidFill>
-                <a:latin typeface="Calibri" pitchFamily="34" charset="0"/>
-                <a:ea typeface="Calibri" pitchFamily="34" charset="-122"/>
-                <a:cs typeface="Calibri" pitchFamily="34" charset="-120"/>
-              </a:rPr>
-              <a:t>pipeline live</a:t>
-            </a:r>
-            <a:endParaRPr lang="en-US" sz="850" dirty="0"/>
-          </a:p>
-        </p:txBody>
-      </p:sp>
-      <p:sp>
-        <p:nvSpPr>
-          <p:cNvPr id="18" name="Shape 16"/>
-          <p:cNvSpPr/>
-          <p:nvPr/>
-        </p:nvSpPr>
-        <p:spPr>
-          <a:xfrm>
-            <a:off x="6739128" y="2240280"/>
-            <a:ext cx="274320" cy="274320"/>
-          </a:xfrm>
-          <a:prstGeom prst="ellipse">
-            <a:avLst/>
-          </a:prstGeom>
-          <a:solidFill>
-            <a:srgbClr val="0C2340"/>
-          </a:solidFill>
-          <a:ln/>
-        </p:spPr>
-      </p:sp>
-      <p:sp>
-        <p:nvSpPr>
-          <p:cNvPr id="19" name="Text 17"/>
-          <p:cNvSpPr/>
-          <p:nvPr/>
-        </p:nvSpPr>
-        <p:spPr>
-          <a:xfrm>
-            <a:off x="6739128" y="2240280"/>
-            <a:ext cx="274320" cy="274320"/>
-          </a:xfrm>
-          <a:prstGeom prst="rect">
-            <a:avLst/>
-          </a:prstGeom>
-          <a:noFill/>
-          <a:ln/>
-        </p:spPr>
-        <p:txBody>
-          <a:bodyPr wrap="square" lIns="0" tIns="0" rIns="0" bIns="0" rtlCol="0" anchor="ctr"/>
-          <a:lstStyle/>
-          <a:p>
-            <a:pPr algn="ctr" indent="0" marL="0">
-              <a:buNone/>
-            </a:pPr>
-            <a:r>
-              <a:rPr lang="en-US" sz="700" dirty="0">
-                <a:solidFill>
-                  <a:srgbClr val="FFFFFF"/>
-                </a:solidFill>
-                <a:latin typeface="Calibri" pitchFamily="34" charset="0"/>
-                <a:ea typeface="Calibri" pitchFamily="34" charset="-122"/>
-                <a:cs typeface="Calibri" pitchFamily="34" charset="-120"/>
-              </a:rPr>
-              <a:t>2030</a:t>
-            </a:r>
-            <a:endParaRPr lang="en-US" sz="700" dirty="0"/>
-          </a:p>
-        </p:txBody>
-      </p:sp>
-      <p:sp>
-        <p:nvSpPr>
-          <p:cNvPr id="20" name="Text 18"/>
-          <p:cNvSpPr/>
-          <p:nvPr/>
-        </p:nvSpPr>
-        <p:spPr>
-          <a:xfrm>
-            <a:off x="6281928" y="1737360"/>
-            <a:ext cx="1188720" cy="411480"/>
-          </a:xfrm>
-          <a:prstGeom prst="rect">
-            <a:avLst/>
-          </a:prstGeom>
-          <a:noFill/>
-          <a:ln/>
-        </p:spPr>
-        <p:txBody>
-          <a:bodyPr wrap="square" lIns="0" tIns="0" rIns="0" bIns="0" rtlCol="0" anchor="b"/>
-          <a:lstStyle/>
-          <a:p>
-            <a:pPr algn="ctr" indent="0" marL="0">
-              <a:buNone/>
-            </a:pPr>
-            <a:r>
-              <a:rPr lang="en-US" sz="850" dirty="0">
-                <a:solidFill>
-                  <a:srgbClr val="404040"/>
-                </a:solidFill>
-                <a:latin typeface="Calibri" pitchFamily="34" charset="0"/>
-                <a:ea typeface="Calibri" pitchFamily="34" charset="-122"/>
-                <a:cs typeface="Calibri" pitchFamily="34" charset="-120"/>
-              </a:rPr>
-              <a:t>Scale-up phase</a:t>
-            </a:r>
-            <a:endParaRPr lang="en-US" sz="850" dirty="0"/>
-          </a:p>
-          <a:p>
-            <a:pPr algn="ctr" indent="0" marL="0">
-              <a:buNone/>
-            </a:pPr>
-            <a:r>
-              <a:rPr lang="en-US" sz="850" dirty="0">
-                <a:solidFill>
-                  <a:srgbClr val="404040"/>
-                </a:solidFill>
-                <a:latin typeface="Calibri" pitchFamily="34" charset="0"/>
-                <a:ea typeface="Calibri" pitchFamily="34" charset="-122"/>
-                <a:cs typeface="Calibri" pitchFamily="34" charset="-120"/>
-              </a:rPr>
-              <a:t>complete</a:t>
-            </a:r>
-            <a:endParaRPr lang="en-US" sz="850" dirty="0"/>
-          </a:p>
-        </p:txBody>
-      </p:sp>
-      <p:sp>
-        <p:nvSpPr>
-          <p:cNvPr id="21" name="Shape 19"/>
-          <p:cNvSpPr/>
-          <p:nvPr/>
-        </p:nvSpPr>
-        <p:spPr>
-          <a:xfrm>
-            <a:off x="8275320" y="2240280"/>
-            <a:ext cx="274320" cy="274320"/>
-          </a:xfrm>
-          <a:prstGeom prst="ellipse">
-            <a:avLst/>
-          </a:prstGeom>
-          <a:solidFill>
-            <a:srgbClr val="0C2340"/>
-          </a:solidFill>
-          <a:ln/>
-        </p:spPr>
-      </p:sp>
-      <p:sp>
-        <p:nvSpPr>
-          <p:cNvPr id="22" name="Text 20"/>
-          <p:cNvSpPr/>
-          <p:nvPr/>
-        </p:nvSpPr>
-        <p:spPr>
-          <a:xfrm>
-            <a:off x="8275320" y="2240280"/>
-            <a:ext cx="274320" cy="274320"/>
-          </a:xfrm>
-          <a:prstGeom prst="rect">
-            <a:avLst/>
-          </a:prstGeom>
-          <a:noFill/>
-          <a:ln/>
-        </p:spPr>
-        <p:txBody>
-          <a:bodyPr wrap="square" lIns="0" tIns="0" rIns="0" bIns="0" rtlCol="0" anchor="ctr"/>
-          <a:lstStyle/>
-          <a:p>
-            <a:pPr algn="ctr" indent="0" marL="0">
-              <a:buNone/>
-            </a:pPr>
-            <a:r>
-              <a:rPr lang="en-US" sz="700" dirty="0">
-                <a:solidFill>
-                  <a:srgbClr val="FFFFFF"/>
-                </a:solidFill>
-                <a:latin typeface="Calibri" pitchFamily="34" charset="0"/>
-                <a:ea typeface="Calibri" pitchFamily="34" charset="-122"/>
-                <a:cs typeface="Calibri" pitchFamily="34" charset="-120"/>
-              </a:rPr>
-              <a:t>2035</a:t>
-            </a:r>
-            <a:endParaRPr lang="en-US" sz="700" dirty="0"/>
-          </a:p>
-        </p:txBody>
-      </p:sp>
-      <p:sp>
-        <p:nvSpPr>
-          <p:cNvPr id="23" name="Text 21"/>
-          <p:cNvSpPr/>
-          <p:nvPr/>
-        </p:nvSpPr>
-        <p:spPr>
-          <a:xfrm>
-            <a:off x="7818120" y="2606040"/>
-            <a:ext cx="1188720" cy="411480"/>
-          </a:xfrm>
-          <a:prstGeom prst="rect">
-            <a:avLst/>
-          </a:prstGeom>
-          <a:noFill/>
-          <a:ln/>
-        </p:spPr>
-        <p:txBody>
-          <a:bodyPr wrap="square" lIns="0" tIns="0" rIns="0" bIns="0" rtlCol="0" anchor="t"/>
-          <a:lstStyle/>
-          <a:p>
-            <a:pPr algn="ctr" indent="0" marL="0">
-              <a:buNone/>
-            </a:pPr>
-            <a:r>
-              <a:rPr lang="en-US" sz="850" dirty="0">
-                <a:solidFill>
-                  <a:srgbClr val="404040"/>
-                </a:solidFill>
-                <a:latin typeface="Calibri" pitchFamily="34" charset="0"/>
-                <a:ea typeface="Calibri" pitchFamily="34" charset="-122"/>
-                <a:cs typeface="Calibri" pitchFamily="34" charset="-120"/>
-              </a:rPr>
-              <a:t>EU hydrogen corridor</a:t>
-            </a:r>
-            <a:endParaRPr lang="en-US" sz="850" dirty="0"/>
-          </a:p>
-          <a:p>
-            <a:pPr algn="ctr" indent="0" marL="0">
-              <a:buNone/>
-            </a:pPr>
-            <a:r>
-              <a:rPr lang="en-US" sz="850" dirty="0">
-                <a:solidFill>
-                  <a:srgbClr val="404040"/>
-                </a:solidFill>
-                <a:latin typeface="Calibri" pitchFamily="34" charset="0"/>
-                <a:ea typeface="Calibri" pitchFamily="34" charset="-122"/>
-                <a:cs typeface="Calibri" pitchFamily="34" charset="-120"/>
-              </a:rPr>
-              <a:t>integration</a:t>
-            </a:r>
-            <a:endParaRPr lang="en-US" sz="850" dirty="0"/>
-          </a:p>
-        </p:txBody>
       </p:sp>
       <p:graphicFrame>
         <p:nvGraphicFramePr>
@@ -1704,79 +1014,62 @@
           </p:nvPr>
         </p:nvGraphicFramePr>
         <p:xfrm>
-          <a:off x="457200" y="3246120"/>
-          <a:ext cx="8229600" cy="914400"/>
+          <a:off x="457200" y="1417320"/>
+          <a:ext cx="8229600" cy="3017520"/>
         </p:xfrm>
         <a:graphic>
           <a:graphicData uri="http://schemas.openxmlformats.org/drawingml/2006/table">
             <a:tbl>
               <a:tblPr/>
               <a:tblGrid>
-                <a:gridCol w="1828800"/>
-                <a:gridCol w="1280160"/>
-                <a:gridCol w="1280160"/>
-                <a:gridCol w="1280160"/>
-                <a:gridCol w="1280160"/>
-                <a:gridCol w="1280160"/>
+                <a:gridCol w="1371600"/>
+                <a:gridCol w="2286000"/>
+                <a:gridCol w="2286000"/>
+                <a:gridCol w="2286000"/>
               </a:tblGrid>
-              <a:tr h="274320">
+              <a:tr h="365760">
                 <a:tc>
                   <a:txBody>
                     <a:bodyPr/>
                     <a:lstStyle/>
                     <a:p>
-                      <a:pPr algn="l" indent="0" marL="0">
-                        <a:buNone/>
-                      </a:pPr>
-                      <a:r>
-                        <a:rPr lang="en-US" sz="800" b="1" dirty="0">
-                          <a:solidFill>
-                            <a:srgbClr val="FFFFFF"/>
-                          </a:solidFill>
-                          <a:latin typeface="Calibri" pitchFamily="34" charset="0"/>
-                          <a:ea typeface="Calibri" pitchFamily="34" charset="-122"/>
-                          <a:cs typeface="Calibri" pitchFamily="34" charset="-120"/>
-                        </a:rPr>
-                        <a:t>Metric</a:t>
-                      </a:r>
-                      <a:endParaRPr lang="en-US" sz="800" dirty="0">
-                        <a:latin typeface="Calibri" charset="0"/>
-                        <a:ea typeface="Calibri" charset="0"/>
-                        <a:cs typeface="Calibri" charset="0"/>
-                      </a:endParaRPr>
+                      <a:pPr indent="0" marL="0">
+                        <a:buNone/>
+                      </a:pPr>
+                      <a:endParaRPr lang="en-US" sz="1000" dirty="0"/>
                     </a:p>
                   </a:txBody>
-                  <a:tcPr marL="50800" marR="50800" marT="25400" marB="25400" anchor="ctr">
-                    <a:lnL w="0" cap="flat" cmpd="sng" algn="ctr">
-                      <a:solidFill>
-                        <a:srgbClr val="FFFFFF"/>
+                  <a:tcPr marL="91440" marR="91440" marT="45720" marB="45720">
+                    <a:lnL w="6350" cap="flat" cmpd="sng" algn="ctr">
+                      <a:solidFill>
+                        <a:srgbClr val="E0E0E0"/>
                       </a:solidFill>
                       <a:prstDash val="solid"/>
                       <a:round/>
                       <a:headEnd type="none" w="med" len="med"/>
                       <a:tailEnd type="none" w="med" len="med"/>
                     </a:lnL>
-                    <a:lnR w="0" cap="flat" cmpd="sng" algn="ctr">
-                      <a:solidFill>
-                        <a:srgbClr val="FFFFFF"/>
+                    <a:lnR w="6350" cap="flat" cmpd="sng" algn="ctr">
+                      <a:solidFill>
+                        <a:srgbClr val="E0E0E0"/>
                       </a:solidFill>
                       <a:prstDash val="solid"/>
                       <a:round/>
                       <a:headEnd type="none" w="med" len="med"/>
                       <a:tailEnd type="none" w="med" len="med"/>
                     </a:lnR>
-                    <a:lnT w="19050" cap="flat" cmpd="sng" algn="ctr">
-                      <a:solidFill>
-                        <a:srgbClr val="0C2340"/>
+                    <a:lnT w="6350" cap="flat" cmpd="sng" algn="ctr">
+                      <a:solidFill>
+                        <a:srgbClr val="E0E0E0"/>
                       </a:solidFill>
                       <a:prstDash val="solid"/>
                       <a:round/>
                       <a:headEnd type="none" w="med" len="med"/>
                       <a:tailEnd type="none" w="med" len="med"/>
                     </a:lnT>
-                    <a:lnB w="19050" cap="flat" cmpd="sng" algn="ctr">
-                      <a:solidFill>
-                        <a:srgbClr val="0C2340"/>
+                    <a:lnB w="6350" cap="flat" cmpd="sng" algn="ctr">
+                      <a:solidFill>
+                        <a:srgbClr val="E0E0E0"/>
                       </a:solidFill>
                       <a:prstDash val="solid"/>
                       <a:round/>
@@ -1784,7 +1077,7 @@
                       <a:tailEnd type="none" w="med" len="med"/>
                     </a:lnB>
                     <a:solidFill>
-                      <a:srgbClr val="0C2340"/>
+                      <a:srgbClr val="FFFFFF"/>
                     </a:solidFill>
                   </a:tcPr>
                 </a:tc>
@@ -1797,54 +1090,75 @@
                         <a:buNone/>
                       </a:pPr>
                       <a:r>
-                        <a:rPr lang="en-US" sz="800" b="1" dirty="0">
-                          <a:solidFill>
-                            <a:srgbClr val="FFFFFF"/>
-                          </a:solidFill>
-                          <a:latin typeface="Calibri" pitchFamily="34" charset="0"/>
-                          <a:ea typeface="Calibri" pitchFamily="34" charset="-122"/>
-                          <a:cs typeface="Calibri" pitchFamily="34" charset="-120"/>
-                        </a:rPr>
-                        <a:t>2020</a:t>
-                      </a:r>
-                      <a:endParaRPr lang="en-US" sz="800" dirty="0">
+                        <a:rPr lang="en-US" sz="1200" b="1" dirty="0">
+                          <a:solidFill>
+                            <a:srgbClr val="000000"/>
+                          </a:solidFill>
+                          <a:latin typeface="Calibri" pitchFamily="34" charset="0"/>
+                          <a:ea typeface="Calibri" pitchFamily="34" charset="-122"/>
+                          <a:cs typeface="Calibri" pitchFamily="34" charset="-120"/>
+                        </a:rPr>
+                        <a:t>Grey</a:t>
+                      </a:r>
+                      <a:endParaRPr lang="en-US" sz="1200" dirty="0">
+                        <a:latin typeface="Calibri" charset="0"/>
+                        <a:ea typeface="Calibri" charset="0"/>
+                        <a:cs typeface="Calibri" charset="0"/>
+                      </a:endParaRPr>
+                    </a:p>
+                    <a:p>
+                      <a:pPr algn="ctr" indent="0" marL="0">
+                        <a:buNone/>
+                      </a:pPr>
+                      <a:r>
+                        <a:rPr lang="en-US" sz="1200" b="1" dirty="0">
+                          <a:solidFill>
+                            <a:srgbClr val="000000"/>
+                          </a:solidFill>
+                          <a:latin typeface="Calibri" pitchFamily="34" charset="0"/>
+                          <a:ea typeface="Calibri" pitchFamily="34" charset="-122"/>
+                          <a:cs typeface="Calibri" pitchFamily="34" charset="-120"/>
+                        </a:rPr>
+                        <a:t>H2</a:t>
+                      </a:r>
+                      <a:endParaRPr lang="en-US" sz="1200" dirty="0">
                         <a:latin typeface="Calibri" charset="0"/>
                         <a:ea typeface="Calibri" charset="0"/>
                         <a:cs typeface="Calibri" charset="0"/>
                       </a:endParaRPr>
                     </a:p>
                   </a:txBody>
-                  <a:tcPr marL="50800" marR="50800" marT="25400" marB="25400" anchor="ctr">
-                    <a:lnL w="0" cap="flat" cmpd="sng" algn="ctr">
-                      <a:solidFill>
-                        <a:srgbClr val="FFFFFF"/>
+                  <a:tcPr marL="91440" marR="91440" marT="45720" marB="45720" anchor="ctr">
+                    <a:lnL w="6350" cap="flat" cmpd="sng" algn="ctr">
+                      <a:solidFill>
+                        <a:srgbClr val="E0E0E0"/>
                       </a:solidFill>
                       <a:prstDash val="solid"/>
                       <a:round/>
                       <a:headEnd type="none" w="med" len="med"/>
                       <a:tailEnd type="none" w="med" len="med"/>
                     </a:lnL>
-                    <a:lnR w="0" cap="flat" cmpd="sng" algn="ctr">
-                      <a:solidFill>
-                        <a:srgbClr val="FFFFFF"/>
+                    <a:lnR w="6350" cap="flat" cmpd="sng" algn="ctr">
+                      <a:solidFill>
+                        <a:srgbClr val="E0E0E0"/>
                       </a:solidFill>
                       <a:prstDash val="solid"/>
                       <a:round/>
                       <a:headEnd type="none" w="med" len="med"/>
                       <a:tailEnd type="none" w="med" len="med"/>
                     </a:lnR>
-                    <a:lnT w="19050" cap="flat" cmpd="sng" algn="ctr">
-                      <a:solidFill>
-                        <a:srgbClr val="0C2340"/>
+                    <a:lnT w="6350" cap="flat" cmpd="sng" algn="ctr">
+                      <a:solidFill>
+                        <a:srgbClr val="E0E0E0"/>
                       </a:solidFill>
                       <a:prstDash val="solid"/>
                       <a:round/>
                       <a:headEnd type="none" w="med" len="med"/>
                       <a:tailEnd type="none" w="med" len="med"/>
                     </a:lnT>
-                    <a:lnB w="19050" cap="flat" cmpd="sng" algn="ctr">
-                      <a:solidFill>
-                        <a:srgbClr val="0C2340"/>
+                    <a:lnB w="6350" cap="flat" cmpd="sng" algn="ctr">
+                      <a:solidFill>
+                        <a:srgbClr val="E0E0E0"/>
                       </a:solidFill>
                       <a:prstDash val="solid"/>
                       <a:round/>
@@ -1852,7 +1166,7 @@
                       <a:tailEnd type="none" w="med" len="med"/>
                     </a:lnB>
                     <a:solidFill>
-                      <a:srgbClr val="0C2340"/>
+                      <a:srgbClr val="FFFFFF"/>
                     </a:solidFill>
                   </a:tcPr>
                 </a:tc>
@@ -1865,54 +1179,75 @@
                         <a:buNone/>
                       </a:pPr>
                       <a:r>
-                        <a:rPr lang="en-US" sz="800" b="1" dirty="0">
-                          <a:solidFill>
-                            <a:srgbClr val="FFFFFF"/>
-                          </a:solidFill>
-                          <a:latin typeface="Calibri" pitchFamily="34" charset="0"/>
-                          <a:ea typeface="Calibri" pitchFamily="34" charset="-122"/>
-                          <a:cs typeface="Calibri" pitchFamily="34" charset="-120"/>
-                        </a:rPr>
-                        <a:t>2025</a:t>
-                      </a:r>
-                      <a:endParaRPr lang="en-US" sz="800" dirty="0">
+                        <a:rPr lang="en-US" sz="1200" b="1" dirty="0">
+                          <a:solidFill>
+                            <a:srgbClr val="000000"/>
+                          </a:solidFill>
+                          <a:latin typeface="Calibri" pitchFamily="34" charset="0"/>
+                          <a:ea typeface="Calibri" pitchFamily="34" charset="-122"/>
+                          <a:cs typeface="Calibri" pitchFamily="34" charset="-120"/>
+                        </a:rPr>
+                        <a:t>Blue</a:t>
+                      </a:r>
+                      <a:endParaRPr lang="en-US" sz="1200" dirty="0">
+                        <a:latin typeface="Calibri" charset="0"/>
+                        <a:ea typeface="Calibri" charset="0"/>
+                        <a:cs typeface="Calibri" charset="0"/>
+                      </a:endParaRPr>
+                    </a:p>
+                    <a:p>
+                      <a:pPr algn="ctr" indent="0" marL="0">
+                        <a:buNone/>
+                      </a:pPr>
+                      <a:r>
+                        <a:rPr lang="en-US" sz="1200" b="1" dirty="0">
+                          <a:solidFill>
+                            <a:srgbClr val="000000"/>
+                          </a:solidFill>
+                          <a:latin typeface="Calibri" pitchFamily="34" charset="0"/>
+                          <a:ea typeface="Calibri" pitchFamily="34" charset="-122"/>
+                          <a:cs typeface="Calibri" pitchFamily="34" charset="-120"/>
+                        </a:rPr>
+                        <a:t>H2</a:t>
+                      </a:r>
+                      <a:endParaRPr lang="en-US" sz="1200" dirty="0">
                         <a:latin typeface="Calibri" charset="0"/>
                         <a:ea typeface="Calibri" charset="0"/>
                         <a:cs typeface="Calibri" charset="0"/>
                       </a:endParaRPr>
                     </a:p>
                   </a:txBody>
-                  <a:tcPr marL="50800" marR="50800" marT="25400" marB="25400" anchor="ctr">
-                    <a:lnL w="0" cap="flat" cmpd="sng" algn="ctr">
-                      <a:solidFill>
-                        <a:srgbClr val="FFFFFF"/>
+                  <a:tcPr marL="91440" marR="91440" marT="45720" marB="45720" anchor="ctr">
+                    <a:lnL w="6350" cap="flat" cmpd="sng" algn="ctr">
+                      <a:solidFill>
+                        <a:srgbClr val="E0E0E0"/>
                       </a:solidFill>
                       <a:prstDash val="solid"/>
                       <a:round/>
                       <a:headEnd type="none" w="med" len="med"/>
                       <a:tailEnd type="none" w="med" len="med"/>
                     </a:lnL>
-                    <a:lnR w="0" cap="flat" cmpd="sng" algn="ctr">
-                      <a:solidFill>
-                        <a:srgbClr val="FFFFFF"/>
+                    <a:lnR w="6350" cap="flat" cmpd="sng" algn="ctr">
+                      <a:solidFill>
+                        <a:srgbClr val="E0E0E0"/>
                       </a:solidFill>
                       <a:prstDash val="solid"/>
                       <a:round/>
                       <a:headEnd type="none" w="med" len="med"/>
                       <a:tailEnd type="none" w="med" len="med"/>
                     </a:lnR>
-                    <a:lnT w="19050" cap="flat" cmpd="sng" algn="ctr">
-                      <a:solidFill>
-                        <a:srgbClr val="0C2340"/>
+                    <a:lnT w="6350" cap="flat" cmpd="sng" algn="ctr">
+                      <a:solidFill>
+                        <a:srgbClr val="E0E0E0"/>
                       </a:solidFill>
                       <a:prstDash val="solid"/>
                       <a:round/>
                       <a:headEnd type="none" w="med" len="med"/>
                       <a:tailEnd type="none" w="med" len="med"/>
                     </a:lnT>
-                    <a:lnB w="19050" cap="flat" cmpd="sng" algn="ctr">
-                      <a:solidFill>
-                        <a:srgbClr val="0C2340"/>
+                    <a:lnB w="6350" cap="flat" cmpd="sng" algn="ctr">
+                      <a:solidFill>
+                        <a:srgbClr val="E0E0E0"/>
                       </a:solidFill>
                       <a:prstDash val="solid"/>
                       <a:round/>
@@ -1920,7 +1255,7 @@
                       <a:tailEnd type="none" w="med" len="med"/>
                     </a:lnB>
                     <a:solidFill>
-                      <a:srgbClr val="0C2340"/>
+                      <a:srgbClr val="D6EAF8"/>
                     </a:solidFill>
                   </a:tcPr>
                 </a:tc>
@@ -1933,54 +1268,75 @@
                         <a:buNone/>
                       </a:pPr>
                       <a:r>
-                        <a:rPr lang="en-US" sz="800" b="1" dirty="0">
-                          <a:solidFill>
-                            <a:srgbClr val="FFFFFF"/>
-                          </a:solidFill>
-                          <a:latin typeface="Calibri" pitchFamily="34" charset="0"/>
-                          <a:ea typeface="Calibri" pitchFamily="34" charset="-122"/>
-                          <a:cs typeface="Calibri" pitchFamily="34" charset="-120"/>
-                        </a:rPr>
-                        <a:t>2028</a:t>
-                      </a:r>
-                      <a:endParaRPr lang="en-US" sz="800" dirty="0">
+                        <a:rPr lang="en-US" sz="1200" b="1" dirty="0">
+                          <a:solidFill>
+                            <a:srgbClr val="000000"/>
+                          </a:solidFill>
+                          <a:latin typeface="Calibri" pitchFamily="34" charset="0"/>
+                          <a:ea typeface="Calibri" pitchFamily="34" charset="-122"/>
+                          <a:cs typeface="Calibri" pitchFamily="34" charset="-120"/>
+                        </a:rPr>
+                        <a:t>Green</a:t>
+                      </a:r>
+                      <a:endParaRPr lang="en-US" sz="1200" dirty="0">
+                        <a:latin typeface="Calibri" charset="0"/>
+                        <a:ea typeface="Calibri" charset="0"/>
+                        <a:cs typeface="Calibri" charset="0"/>
+                      </a:endParaRPr>
+                    </a:p>
+                    <a:p>
+                      <a:pPr algn="ctr" indent="0" marL="0">
+                        <a:buNone/>
+                      </a:pPr>
+                      <a:r>
+                        <a:rPr lang="en-US" sz="1200" b="1" dirty="0">
+                          <a:solidFill>
+                            <a:srgbClr val="000000"/>
+                          </a:solidFill>
+                          <a:latin typeface="Calibri" pitchFamily="34" charset="0"/>
+                          <a:ea typeface="Calibri" pitchFamily="34" charset="-122"/>
+                          <a:cs typeface="Calibri" pitchFamily="34" charset="-120"/>
+                        </a:rPr>
+                        <a:t>H2</a:t>
+                      </a:r>
+                      <a:endParaRPr lang="en-US" sz="1200" dirty="0">
                         <a:latin typeface="Calibri" charset="0"/>
                         <a:ea typeface="Calibri" charset="0"/>
                         <a:cs typeface="Calibri" charset="0"/>
                       </a:endParaRPr>
                     </a:p>
                   </a:txBody>
-                  <a:tcPr marL="50800" marR="50800" marT="25400" marB="25400" anchor="ctr">
-                    <a:lnL w="0" cap="flat" cmpd="sng" algn="ctr">
-                      <a:solidFill>
-                        <a:srgbClr val="FFFFFF"/>
+                  <a:tcPr marL="91440" marR="91440" marT="45720" marB="45720" anchor="ctr">
+                    <a:lnL w="6350" cap="flat" cmpd="sng" algn="ctr">
+                      <a:solidFill>
+                        <a:srgbClr val="E0E0E0"/>
                       </a:solidFill>
                       <a:prstDash val="solid"/>
                       <a:round/>
                       <a:headEnd type="none" w="med" len="med"/>
                       <a:tailEnd type="none" w="med" len="med"/>
                     </a:lnL>
-                    <a:lnR w="0" cap="flat" cmpd="sng" algn="ctr">
-                      <a:solidFill>
-                        <a:srgbClr val="FFFFFF"/>
+                    <a:lnR w="6350" cap="flat" cmpd="sng" algn="ctr">
+                      <a:solidFill>
+                        <a:srgbClr val="E0E0E0"/>
                       </a:solidFill>
                       <a:prstDash val="solid"/>
                       <a:round/>
                       <a:headEnd type="none" w="med" len="med"/>
                       <a:tailEnd type="none" w="med" len="med"/>
                     </a:lnR>
-                    <a:lnT w="19050" cap="flat" cmpd="sng" algn="ctr">
-                      <a:solidFill>
-                        <a:srgbClr val="0C2340"/>
+                    <a:lnT w="6350" cap="flat" cmpd="sng" algn="ctr">
+                      <a:solidFill>
+                        <a:srgbClr val="E0E0E0"/>
                       </a:solidFill>
                       <a:prstDash val="solid"/>
                       <a:round/>
                       <a:headEnd type="none" w="med" len="med"/>
                       <a:tailEnd type="none" w="med" len="med"/>
                     </a:lnT>
-                    <a:lnB w="19050" cap="flat" cmpd="sng" algn="ctr">
-                      <a:solidFill>
-                        <a:srgbClr val="0C2340"/>
+                    <a:lnB w="6350" cap="flat" cmpd="sng" algn="ctr">
+                      <a:solidFill>
+                        <a:srgbClr val="E0E0E0"/>
                       </a:solidFill>
                       <a:prstDash val="solid"/>
                       <a:round/>
@@ -1988,7 +1344,98 @@
                       <a:tailEnd type="none" w="med" len="med"/>
                     </a:lnB>
                     <a:solidFill>
-                      <a:srgbClr val="0C2340"/>
+                      <a:srgbClr val="D5F5E3"/>
+                    </a:solidFill>
+                  </a:tcPr>
+                </a:tc>
+              </a:tr>
+              <a:tr h="502920">
+                <a:tc>
+                  <a:txBody>
+                    <a:bodyPr/>
+                    <a:lstStyle/>
+                    <a:p>
+                      <a:pPr indent="0" marL="0">
+                        <a:buNone/>
+                      </a:pPr>
+                      <a:r>
+                        <a:rPr lang="en-US" sz="1000" b="1" dirty="0">
+                          <a:solidFill>
+                            <a:srgbClr val="000000"/>
+                          </a:solidFill>
+                          <a:latin typeface="Calibri" pitchFamily="34" charset="0"/>
+                          <a:ea typeface="Calibri" pitchFamily="34" charset="-122"/>
+                          <a:cs typeface="Calibri" pitchFamily="34" charset="-120"/>
+                        </a:rPr>
+                        <a:t>Production</a:t>
+                      </a:r>
+                      <a:endParaRPr lang="en-US" sz="1000" dirty="0">
+                        <a:latin typeface="Calibri" charset="0"/>
+                        <a:ea typeface="Calibri" charset="0"/>
+                        <a:cs typeface="Calibri" charset="0"/>
+                      </a:endParaRPr>
+                    </a:p>
+                    <a:p>
+                      <a:pPr indent="0" marL="0">
+                        <a:buNone/>
+                      </a:pPr>
+                      <a:r>
+                        <a:rPr lang="en-US" sz="1000" b="1" dirty="0">
+                          <a:solidFill>
+                            <a:srgbClr val="000000"/>
+                          </a:solidFill>
+                          <a:latin typeface="Calibri" pitchFamily="34" charset="0"/>
+                          <a:ea typeface="Calibri" pitchFamily="34" charset="-122"/>
+                          <a:cs typeface="Calibri" pitchFamily="34" charset="-120"/>
+                        </a:rPr>
+                        <a:t>process</a:t>
+                      </a:r>
+                      <a:endParaRPr lang="en-US" sz="1000" dirty="0">
+                        <a:latin typeface="Calibri" charset="0"/>
+                        <a:ea typeface="Calibri" charset="0"/>
+                        <a:cs typeface="Calibri" charset="0"/>
+                      </a:endParaRPr>
+                    </a:p>
+                  </a:txBody>
+                  <a:tcPr marL="91440" marR="91440" marT="45720" marB="45720" anchor="ctr">
+                    <a:lnL w="6350" cap="flat" cmpd="sng" algn="ctr">
+                      <a:solidFill>
+                        <a:srgbClr val="E0E0E0"/>
+                      </a:solidFill>
+                      <a:prstDash val="solid"/>
+                      <a:round/>
+                      <a:headEnd type="none" w="med" len="med"/>
+                      <a:tailEnd type="none" w="med" len="med"/>
+                    </a:lnL>
+                    <a:lnR w="6350" cap="flat" cmpd="sng" algn="ctr">
+                      <a:solidFill>
+                        <a:srgbClr val="E0E0E0"/>
+                      </a:solidFill>
+                      <a:prstDash val="solid"/>
+                      <a:round/>
+                      <a:headEnd type="none" w="med" len="med"/>
+                      <a:tailEnd type="none" w="med" len="med"/>
+                    </a:lnR>
+                    <a:lnT w="6350" cap="flat" cmpd="sng" algn="ctr">
+                      <a:solidFill>
+                        <a:srgbClr val="E0E0E0"/>
+                      </a:solidFill>
+                      <a:prstDash val="solid"/>
+                      <a:round/>
+                      <a:headEnd type="none" w="med" len="med"/>
+                      <a:tailEnd type="none" w="med" len="med"/>
+                    </a:lnT>
+                    <a:lnB w="6350" cap="flat" cmpd="sng" algn="ctr">
+                      <a:solidFill>
+                        <a:srgbClr val="E0E0E0"/>
+                      </a:solidFill>
+                      <a:prstDash val="solid"/>
+                      <a:round/>
+                      <a:headEnd type="none" w="med" len="med"/>
+                      <a:tailEnd type="none" w="med" len="med"/>
+                    </a:lnB>
+                    <a:solidFill>
+                      <a:srgbClr val="FFFFFF"/>
                     </a:solidFill>
                   </a:tcPr>
                 </a:tc>
@@ -1997,58 +1444,79 @@
                     <a:bodyPr/>
                     <a:lstStyle/>
                     <a:p>
-                      <a:pPr algn="ctr" indent="0" marL="0">
-                        <a:buNone/>
-                      </a:pPr>
-                      <a:r>
-                        <a:rPr lang="en-US" sz="800" b="1" dirty="0">
-                          <a:solidFill>
-                            <a:srgbClr val="FFFFFF"/>
-                          </a:solidFill>
-                          <a:latin typeface="Calibri" pitchFamily="34" charset="0"/>
-                          <a:ea typeface="Calibri" pitchFamily="34" charset="-122"/>
-                          <a:cs typeface="Calibri" pitchFamily="34" charset="-120"/>
-                        </a:rPr>
-                        <a:t>2030</a:t>
-                      </a:r>
-                      <a:endParaRPr lang="en-US" sz="800" dirty="0">
+                      <a:pPr indent="0" marL="0">
+                        <a:buNone/>
+                      </a:pPr>
+                      <a:r>
+                        <a:rPr lang="en-US" sz="1000" dirty="0">
+                          <a:solidFill>
+                            <a:srgbClr val="333333"/>
+                          </a:solidFill>
+                          <a:latin typeface="Calibri" pitchFamily="34" charset="0"/>
+                          <a:ea typeface="Calibri" pitchFamily="34" charset="-122"/>
+                          <a:cs typeface="Calibri" pitchFamily="34" charset="-120"/>
+                        </a:rPr>
+                        <a:t>Split¹ natural gas</a:t>
+                      </a:r>
+                      <a:endParaRPr lang="en-US" sz="1000" dirty="0">
+                        <a:latin typeface="Calibri" charset="0"/>
+                        <a:ea typeface="Calibri" charset="0"/>
+                        <a:cs typeface="Calibri" charset="0"/>
+                      </a:endParaRPr>
+                    </a:p>
+                    <a:p>
+                      <a:pPr indent="0" marL="0">
+                        <a:buNone/>
+                      </a:pPr>
+                      <a:r>
+                        <a:rPr lang="en-US" sz="1000" dirty="0">
+                          <a:solidFill>
+                            <a:srgbClr val="333333"/>
+                          </a:solidFill>
+                          <a:latin typeface="Calibri" pitchFamily="34" charset="0"/>
+                          <a:ea typeface="Calibri" pitchFamily="34" charset="-122"/>
+                          <a:cs typeface="Calibri" pitchFamily="34" charset="-120"/>
+                        </a:rPr>
+                        <a:t>into H2 and CO2</a:t>
+                      </a:r>
+                      <a:endParaRPr lang="en-US" sz="1000" dirty="0">
                         <a:latin typeface="Calibri" charset="0"/>
                         <a:ea typeface="Calibri" charset="0"/>
                         <a:cs typeface="Calibri" charset="0"/>
                       </a:endParaRPr>
                     </a:p>
                   </a:txBody>
-                  <a:tcPr marL="50800" marR="50800" marT="25400" marB="25400" anchor="ctr">
-                    <a:lnL w="0" cap="flat" cmpd="sng" algn="ctr">
-                      <a:solidFill>
-                        <a:srgbClr val="FFFFFF"/>
+                  <a:tcPr marL="91440" marR="91440" marT="45720" marB="45720" anchor="ctr">
+                    <a:lnL w="6350" cap="flat" cmpd="sng" algn="ctr">
+                      <a:solidFill>
+                        <a:srgbClr val="E0E0E0"/>
                       </a:solidFill>
                       <a:prstDash val="solid"/>
                       <a:round/>
                       <a:headEnd type="none" w="med" len="med"/>
                       <a:tailEnd type="none" w="med" len="med"/>
                     </a:lnL>
-                    <a:lnR w="0" cap="flat" cmpd="sng" algn="ctr">
-                      <a:solidFill>
-                        <a:srgbClr val="FFFFFF"/>
+                    <a:lnR w="6350" cap="flat" cmpd="sng" algn="ctr">
+                      <a:solidFill>
+                        <a:srgbClr val="E0E0E0"/>
                       </a:solidFill>
                       <a:prstDash val="solid"/>
                       <a:round/>
                       <a:headEnd type="none" w="med" len="med"/>
                       <a:tailEnd type="none" w="med" len="med"/>
                     </a:lnR>
-                    <a:lnT w="19050" cap="flat" cmpd="sng" algn="ctr">
-                      <a:solidFill>
-                        <a:srgbClr val="0C2340"/>
+                    <a:lnT w="6350" cap="flat" cmpd="sng" algn="ctr">
+                      <a:solidFill>
+                        <a:srgbClr val="E0E0E0"/>
                       </a:solidFill>
                       <a:prstDash val="solid"/>
                       <a:round/>
                       <a:headEnd type="none" w="med" len="med"/>
                       <a:tailEnd type="none" w="med" len="med"/>
                     </a:lnT>
-                    <a:lnB w="19050" cap="flat" cmpd="sng" algn="ctr">
-                      <a:solidFill>
-                        <a:srgbClr val="0C2340"/>
+                    <a:lnB w="6350" cap="flat" cmpd="sng" algn="ctr">
+                      <a:solidFill>
+                        <a:srgbClr val="E0E0E0"/>
                       </a:solidFill>
                       <a:prstDash val="solid"/>
                       <a:round/>
@@ -2056,7 +1524,7 @@
                       <a:tailEnd type="none" w="med" len="med"/>
                     </a:lnB>
                     <a:solidFill>
-                      <a:srgbClr val="0C2340"/>
+                      <a:srgbClr val="FFFFFF"/>
                     </a:solidFill>
                   </a:tcPr>
                 </a:tc>
@@ -2065,58 +1533,79 @@
                     <a:bodyPr/>
                     <a:lstStyle/>
                     <a:p>
-                      <a:pPr algn="ctr" indent="0" marL="0">
-                        <a:buNone/>
-                      </a:pPr>
-                      <a:r>
-                        <a:rPr lang="en-US" sz="800" b="1" dirty="0">
-                          <a:solidFill>
-                            <a:srgbClr val="FFFFFF"/>
-                          </a:solidFill>
-                          <a:latin typeface="Calibri" pitchFamily="34" charset="0"/>
-                          <a:ea typeface="Calibri" pitchFamily="34" charset="-122"/>
-                          <a:cs typeface="Calibri" pitchFamily="34" charset="-120"/>
-                        </a:rPr>
-                        <a:t>2035</a:t>
-                      </a:r>
-                      <a:endParaRPr lang="en-US" sz="800" dirty="0">
+                      <a:pPr indent="0" marL="0">
+                        <a:buNone/>
+                      </a:pPr>
+                      <a:r>
+                        <a:rPr lang="en-US" sz="1000" dirty="0">
+                          <a:solidFill>
+                            <a:srgbClr val="333333"/>
+                          </a:solidFill>
+                          <a:latin typeface="Calibri" pitchFamily="34" charset="0"/>
+                          <a:ea typeface="Calibri" pitchFamily="34" charset="-122"/>
+                          <a:cs typeface="Calibri" pitchFamily="34" charset="-120"/>
+                        </a:rPr>
+                        <a:t>Similar to Grey but additionally</a:t>
+                      </a:r>
+                      <a:endParaRPr lang="en-US" sz="1000" dirty="0">
+                        <a:latin typeface="Calibri" charset="0"/>
+                        <a:ea typeface="Calibri" charset="0"/>
+                        <a:cs typeface="Calibri" charset="0"/>
+                      </a:endParaRPr>
+                    </a:p>
+                    <a:p>
+                      <a:pPr indent="0" marL="0">
+                        <a:buNone/>
+                      </a:pPr>
+                      <a:r>
+                        <a:rPr lang="en-US" sz="1000" dirty="0">
+                          <a:solidFill>
+                            <a:srgbClr val="333333"/>
+                          </a:solidFill>
+                          <a:latin typeface="Calibri" pitchFamily="34" charset="0"/>
+                          <a:ea typeface="Calibri" pitchFamily="34" charset="-122"/>
+                          <a:cs typeface="Calibri" pitchFamily="34" charset="-120"/>
+                        </a:rPr>
+                        <a:t>capture, potentially use, and store CO2</a:t>
+                      </a:r>
+                      <a:endParaRPr lang="en-US" sz="1000" dirty="0">
                         <a:latin typeface="Calibri" charset="0"/>
                         <a:ea typeface="Calibri" charset="0"/>
                         <a:cs typeface="Calibri" charset="0"/>
                       </a:endParaRPr>
                     </a:p>
                   </a:txBody>
-                  <a:tcPr marL="50800" marR="50800" marT="25400" marB="25400" anchor="ctr">
-                    <a:lnL w="0" cap="flat" cmpd="sng" algn="ctr">
-                      <a:solidFill>
-                        <a:srgbClr val="FFFFFF"/>
+                  <a:tcPr marL="91440" marR="91440" marT="45720" marB="45720" anchor="ctr">
+                    <a:lnL w="6350" cap="flat" cmpd="sng" algn="ctr">
+                      <a:solidFill>
+                        <a:srgbClr val="E0E0E0"/>
                       </a:solidFill>
                       <a:prstDash val="solid"/>
                       <a:round/>
                       <a:headEnd type="none" w="med" len="med"/>
                       <a:tailEnd type="none" w="med" len="med"/>
                     </a:lnL>
-                    <a:lnR w="0" cap="flat" cmpd="sng" algn="ctr">
-                      <a:solidFill>
-                        <a:srgbClr val="FFFFFF"/>
+                    <a:lnR w="6350" cap="flat" cmpd="sng" algn="ctr">
+                      <a:solidFill>
+                        <a:srgbClr val="E0E0E0"/>
                       </a:solidFill>
                       <a:prstDash val="solid"/>
                       <a:round/>
                       <a:headEnd type="none" w="med" len="med"/>
                       <a:tailEnd type="none" w="med" len="med"/>
                     </a:lnR>
-                    <a:lnT w="19050" cap="flat" cmpd="sng" algn="ctr">
-                      <a:solidFill>
-                        <a:srgbClr val="0C2340"/>
+                    <a:lnT w="6350" cap="flat" cmpd="sng" algn="ctr">
+                      <a:solidFill>
+                        <a:srgbClr val="E0E0E0"/>
                       </a:solidFill>
                       <a:prstDash val="solid"/>
                       <a:round/>
                       <a:headEnd type="none" w="med" len="med"/>
                       <a:tailEnd type="none" w="med" len="med"/>
                     </a:lnT>
-                    <a:lnB w="19050" cap="flat" cmpd="sng" algn="ctr">
-                      <a:solidFill>
-                        <a:srgbClr val="0C2340"/>
+                    <a:lnB w="6350" cap="flat" cmpd="sng" algn="ctr">
+                      <a:solidFill>
+                        <a:srgbClr val="E0E0E0"/>
                       </a:solidFill>
                       <a:prstDash val="solid"/>
                       <a:round/>
@@ -2124,75 +1613,8 @@
                       <a:tailEnd type="none" w="med" len="med"/>
                     </a:lnB>
                     <a:solidFill>
-                      <a:srgbClr val="0C2340"/>
+                      <a:srgbClr val="EBF5FB"/>
                     </a:solidFill>
-                  </a:tcPr>
-                </a:tc>
-              </a:tr>
-              <a:tr h="256032">
-                <a:tc>
-                  <a:txBody>
-                    <a:bodyPr/>
-                    <a:lstStyle/>
-                    <a:p>
-                      <a:pPr algn="l" indent="0" marL="0">
-                        <a:buNone/>
-                      </a:pPr>
-                      <a:r>
-                        <a:rPr lang="en-US" sz="800" b="1" dirty="0">
-                          <a:solidFill>
-                            <a:srgbClr val="404040"/>
-                          </a:solidFill>
-                          <a:latin typeface="Calibri" pitchFamily="34" charset="0"/>
-                          <a:ea typeface="Calibri" pitchFamily="34" charset="-122"/>
-                          <a:cs typeface="Calibri" pitchFamily="34" charset="-120"/>
-                        </a:rPr>
-                        <a:t>Electrolyzer Capacity (GW)</a:t>
-                      </a:r>
-                      <a:endParaRPr lang="en-US" sz="800" dirty="0">
-                        <a:latin typeface="Calibri" charset="0"/>
-                        <a:ea typeface="Calibri" charset="0"/>
-                        <a:cs typeface="Calibri" charset="0"/>
-                      </a:endParaRPr>
-                    </a:p>
-                  </a:txBody>
-                  <a:tcPr marL="50800" marR="50800" marT="25400" marB="25400" anchor="ctr">
-                    <a:lnL w="0" cap="flat" cmpd="sng" algn="ctr">
-                      <a:solidFill>
-                        <a:srgbClr val="FFFFFF"/>
-                      </a:solidFill>
-                      <a:prstDash val="solid"/>
-                      <a:round/>
-                      <a:headEnd type="none" w="med" len="med"/>
-                      <a:tailEnd type="none" w="med" len="med"/>
-                    </a:lnL>
-                    <a:lnR w="0" cap="flat" cmpd="sng" algn="ctr">
-                      <a:solidFill>
-                        <a:srgbClr val="FFFFFF"/>
-                      </a:solidFill>
-                      <a:prstDash val="solid"/>
-                      <a:round/>
-                      <a:headEnd type="none" w="med" len="med"/>
-                      <a:tailEnd type="none" w="med" len="med"/>
-                    </a:lnR>
-                    <a:lnT w="0" cap="flat" cmpd="sng" algn="ctr">
-                      <a:solidFill>
-                        <a:srgbClr val="E8E8E8"/>
-                      </a:solidFill>
-                      <a:prstDash val="solid"/>
-                      <a:round/>
-                      <a:headEnd type="none" w="med" len="med"/>
-                      <a:tailEnd type="none" w="med" len="med"/>
-                    </a:lnT>
-                    <a:lnB w="6350" cap="flat" cmpd="sng" algn="ctr">
-                      <a:solidFill>
-                        <a:srgbClr val="E8E8E8"/>
-                      </a:solidFill>
-                      <a:prstDash val="solid"/>
-                      <a:round/>
-                      <a:headEnd type="none" w="med" len="med"/>
-                      <a:tailEnd type="none" w="med" len="med"/>
-                    </a:lnB>
                   </a:tcPr>
                 </a:tc>
                 <a:tc>
@@ -2200,49 +1622,70 @@
                     <a:bodyPr/>
                     <a:lstStyle/>
                     <a:p>
-                      <a:pPr algn="ctr" indent="0" marL="0">
-                        <a:buNone/>
-                      </a:pPr>
-                      <a:r>
-                        <a:rPr lang="en-US" sz="800" dirty="0">
-                          <a:solidFill>
-                            <a:srgbClr val="404040"/>
-                          </a:solidFill>
-                          <a:latin typeface="Calibri" pitchFamily="34" charset="0"/>
-                          <a:ea typeface="Calibri" pitchFamily="34" charset="-122"/>
-                          <a:cs typeface="Calibri" pitchFamily="34" charset="-120"/>
-                        </a:rPr>
-                        <a:t>~0.5</a:t>
-                      </a:r>
-                      <a:endParaRPr lang="en-US" sz="800" dirty="0">
+                      <a:pPr indent="0" marL="0">
+                        <a:buNone/>
+                      </a:pPr>
+                      <a:r>
+                        <a:rPr lang="en-US" sz="1000" dirty="0">
+                          <a:solidFill>
+                            <a:srgbClr val="333333"/>
+                          </a:solidFill>
+                          <a:latin typeface="Calibri" pitchFamily="34" charset="0"/>
+                          <a:ea typeface="Calibri" pitchFamily="34" charset="-122"/>
+                          <a:cs typeface="Calibri" pitchFamily="34" charset="-120"/>
+                        </a:rPr>
+                        <a:t>Split water into H2 and O2 in an</a:t>
+                      </a:r>
+                      <a:endParaRPr lang="en-US" sz="1000" dirty="0">
+                        <a:latin typeface="Calibri" charset="0"/>
+                        <a:ea typeface="Calibri" charset="0"/>
+                        <a:cs typeface="Calibri" charset="0"/>
+                      </a:endParaRPr>
+                    </a:p>
+                    <a:p>
+                      <a:pPr indent="0" marL="0">
+                        <a:buNone/>
+                      </a:pPr>
+                      <a:r>
+                        <a:rPr lang="en-US" sz="1000" dirty="0">
+                          <a:solidFill>
+                            <a:srgbClr val="333333"/>
+                          </a:solidFill>
+                          <a:latin typeface="Calibri" pitchFamily="34" charset="0"/>
+                          <a:ea typeface="Calibri" pitchFamily="34" charset="-122"/>
+                          <a:cs typeface="Calibri" pitchFamily="34" charset="-120"/>
+                        </a:rPr>
+                        <a:t>electrolyzer powered by renewables</a:t>
+                      </a:r>
+                      <a:endParaRPr lang="en-US" sz="1000" dirty="0">
                         <a:latin typeface="Calibri" charset="0"/>
                         <a:ea typeface="Calibri" charset="0"/>
                         <a:cs typeface="Calibri" charset="0"/>
                       </a:endParaRPr>
                     </a:p>
                   </a:txBody>
-                  <a:tcPr marL="50800" marR="50800" marT="25400" marB="25400" anchor="ctr">
-                    <a:lnL w="0" cap="flat" cmpd="sng" algn="ctr">
-                      <a:solidFill>
-                        <a:srgbClr val="FFFFFF"/>
+                  <a:tcPr marL="91440" marR="91440" marT="45720" marB="45720" anchor="ctr">
+                    <a:lnL w="6350" cap="flat" cmpd="sng" algn="ctr">
+                      <a:solidFill>
+                        <a:srgbClr val="E0E0E0"/>
                       </a:solidFill>
                       <a:prstDash val="solid"/>
                       <a:round/>
                       <a:headEnd type="none" w="med" len="med"/>
                       <a:tailEnd type="none" w="med" len="med"/>
                     </a:lnL>
-                    <a:lnR w="0" cap="flat" cmpd="sng" algn="ctr">
-                      <a:solidFill>
-                        <a:srgbClr val="FFFFFF"/>
+                    <a:lnR w="6350" cap="flat" cmpd="sng" algn="ctr">
+                      <a:solidFill>
+                        <a:srgbClr val="E0E0E0"/>
                       </a:solidFill>
                       <a:prstDash val="solid"/>
                       <a:round/>
                       <a:headEnd type="none" w="med" len="med"/>
                       <a:tailEnd type="none" w="med" len="med"/>
                     </a:lnR>
-                    <a:lnT w="0" cap="flat" cmpd="sng" algn="ctr">
-                      <a:solidFill>
-                        <a:srgbClr val="E8E8E8"/>
+                    <a:lnT w="6350" cap="flat" cmpd="sng" algn="ctr">
+                      <a:solidFill>
+                        <a:srgbClr val="E0E0E0"/>
                       </a:solidFill>
                       <a:prstDash val="solid"/>
                       <a:round/>
@@ -2251,13 +1694,107 @@
                     </a:lnT>
                     <a:lnB w="6350" cap="flat" cmpd="sng" algn="ctr">
                       <a:solidFill>
-                        <a:srgbClr val="E8E8E8"/>
+                        <a:srgbClr val="E0E0E0"/>
                       </a:solidFill>
                       <a:prstDash val="solid"/>
                       <a:round/>
                       <a:headEnd type="none" w="med" len="med"/>
                       <a:tailEnd type="none" w="med" len="med"/>
                     </a:lnB>
+                    <a:solidFill>
+                      <a:srgbClr val="EAFAF1"/>
+                    </a:solidFill>
+                  </a:tcPr>
+                </a:tc>
+              </a:tr>
+              <a:tr h="502920">
+                <a:tc>
+                  <a:txBody>
+                    <a:bodyPr/>
+                    <a:lstStyle/>
+                    <a:p>
+                      <a:pPr indent="0" marL="0">
+                        <a:buNone/>
+                      </a:pPr>
+                      <a:r>
+                        <a:rPr lang="en-US" sz="1000" b="1" dirty="0">
+                          <a:solidFill>
+                            <a:srgbClr val="000000"/>
+                          </a:solidFill>
+                          <a:latin typeface="Calibri" pitchFamily="34" charset="0"/>
+                          <a:ea typeface="Calibri" pitchFamily="34" charset="-122"/>
+                          <a:cs typeface="Calibri" pitchFamily="34" charset="-120"/>
+                        </a:rPr>
+                        <a:t>CO2 emissions</a:t>
+                      </a:r>
+                      <a:endParaRPr lang="en-US" sz="1000" dirty="0">
+                        <a:latin typeface="Calibri" charset="0"/>
+                        <a:ea typeface="Calibri" charset="0"/>
+                        <a:cs typeface="Calibri" charset="0"/>
+                      </a:endParaRPr>
+                    </a:p>
+                    <a:p>
+                      <a:pPr indent="0" marL="0">
+                        <a:buNone/>
+                      </a:pPr>
+                      <a:r>
+                        <a:rPr lang="en-US" sz="1000" b="1" dirty="0">
+                          <a:solidFill>
+                            <a:srgbClr val="000000"/>
+                          </a:solidFill>
+                          <a:latin typeface="Calibri" pitchFamily="34" charset="0"/>
+                          <a:ea typeface="Calibri" pitchFamily="34" charset="-122"/>
+                          <a:cs typeface="Calibri" pitchFamily="34" charset="-120"/>
+                        </a:rPr>
+                        <a:t>(kg CO2/kgH2)</a:t>
+                      </a:r>
+                      <a:endParaRPr lang="en-US" sz="1000" dirty="0">
+                        <a:latin typeface="Calibri" charset="0"/>
+                        <a:ea typeface="Calibri" charset="0"/>
+                        <a:cs typeface="Calibri" charset="0"/>
+                      </a:endParaRPr>
+                    </a:p>
+                  </a:txBody>
+                  <a:tcPr marL="91440" marR="91440" marT="45720" marB="45720" anchor="ctr">
+                    <a:lnL w="6350" cap="flat" cmpd="sng" algn="ctr">
+                      <a:solidFill>
+                        <a:srgbClr val="E0E0E0"/>
+                      </a:solidFill>
+                      <a:prstDash val="solid"/>
+                      <a:round/>
+                      <a:headEnd type="none" w="med" len="med"/>
+                      <a:tailEnd type="none" w="med" len="med"/>
+                    </a:lnL>
+                    <a:lnR w="6350" cap="flat" cmpd="sng" algn="ctr">
+                      <a:solidFill>
+                        <a:srgbClr val="E0E0E0"/>
+                      </a:solidFill>
+                      <a:prstDash val="solid"/>
+                      <a:round/>
+                      <a:headEnd type="none" w="med" len="med"/>
+                      <a:tailEnd type="none" w="med" len="med"/>
+                    </a:lnR>
+                    <a:lnT w="6350" cap="flat" cmpd="sng" algn="ctr">
+                      <a:solidFill>
+                        <a:srgbClr val="E0E0E0"/>
+                      </a:solidFill>
+                      <a:prstDash val="solid"/>
+                      <a:round/>
+                      <a:headEnd type="none" w="med" len="med"/>
+                      <a:tailEnd type="none" w="med" len="med"/>
+                    </a:lnT>
+                    <a:lnB w="6350" cap="flat" cmpd="sng" algn="ctr">
+                      <a:solidFill>
+                        <a:srgbClr val="E0E0E0"/>
+                      </a:solidFill>
+                      <a:prstDash val="solid"/>
+                      <a:round/>
+                      <a:headEnd type="none" w="med" len="med"/>
+                      <a:tailEnd type="none" w="med" len="med"/>
+                    </a:lnB>
+                    <a:solidFill>
+                      <a:srgbClr val="FFFFFF"/>
+                    </a:solidFill>
                   </a:tcPr>
                 </a:tc>
                 <a:tc>
@@ -2265,49 +1802,49 @@
                     <a:bodyPr/>
                     <a:lstStyle/>
                     <a:p>
-                      <a:pPr algn="ctr" indent="0" marL="0">
-                        <a:buNone/>
-                      </a:pPr>
-                      <a:r>
-                        <a:rPr lang="en-US" sz="800" dirty="0">
-                          <a:solidFill>
-                            <a:srgbClr val="404040"/>
-                          </a:solidFill>
-                          <a:latin typeface="Calibri" pitchFamily="34" charset="0"/>
-                          <a:ea typeface="Calibri" pitchFamily="34" charset="-122"/>
-                          <a:cs typeface="Calibri" pitchFamily="34" charset="-120"/>
-                        </a:rPr>
-                        <a:t>1.0</a:t>
-                      </a:r>
-                      <a:endParaRPr lang="en-US" sz="800" dirty="0">
+                      <a:pPr indent="0" marL="0">
+                        <a:buNone/>
+                      </a:pPr>
+                      <a:r>
+                        <a:rPr lang="en-US" sz="1000" dirty="0">
+                          <a:solidFill>
+                            <a:srgbClr val="333333"/>
+                          </a:solidFill>
+                          <a:latin typeface="Calibri" pitchFamily="34" charset="0"/>
+                          <a:ea typeface="Calibri" pitchFamily="34" charset="-122"/>
+                          <a:cs typeface="Calibri" pitchFamily="34" charset="-120"/>
+                        </a:rPr>
+                        <a:t>~10</a:t>
+                      </a:r>
+                      <a:endParaRPr lang="en-US" sz="1000" dirty="0">
                         <a:latin typeface="Calibri" charset="0"/>
                         <a:ea typeface="Calibri" charset="0"/>
                         <a:cs typeface="Calibri" charset="0"/>
                       </a:endParaRPr>
                     </a:p>
                   </a:txBody>
-                  <a:tcPr marL="50800" marR="50800" marT="25400" marB="25400" anchor="ctr">
-                    <a:lnL w="0" cap="flat" cmpd="sng" algn="ctr">
-                      <a:solidFill>
-                        <a:srgbClr val="FFFFFF"/>
+                  <a:tcPr marL="91440" marR="91440" marT="45720" marB="45720" anchor="ctr">
+                    <a:lnL w="6350" cap="flat" cmpd="sng" algn="ctr">
+                      <a:solidFill>
+                        <a:srgbClr val="E0E0E0"/>
                       </a:solidFill>
                       <a:prstDash val="solid"/>
                       <a:round/>
                       <a:headEnd type="none" w="med" len="med"/>
                       <a:tailEnd type="none" w="med" len="med"/>
                     </a:lnL>
-                    <a:lnR w="0" cap="flat" cmpd="sng" algn="ctr">
-                      <a:solidFill>
-                        <a:srgbClr val="FFFFFF"/>
+                    <a:lnR w="6350" cap="flat" cmpd="sng" algn="ctr">
+                      <a:solidFill>
+                        <a:srgbClr val="E0E0E0"/>
                       </a:solidFill>
                       <a:prstDash val="solid"/>
                       <a:round/>
                       <a:headEnd type="none" w="med" len="med"/>
                       <a:tailEnd type="none" w="med" len="med"/>
                     </a:lnR>
-                    <a:lnT w="0" cap="flat" cmpd="sng" algn="ctr">
-                      <a:solidFill>
-                        <a:srgbClr val="E8E8E8"/>
+                    <a:lnT w="6350" cap="flat" cmpd="sng" algn="ctr">
+                      <a:solidFill>
+                        <a:srgbClr val="E0E0E0"/>
                       </a:solidFill>
                       <a:prstDash val="solid"/>
                       <a:round/>
@@ -2316,13 +1853,16 @@
                     </a:lnT>
                     <a:lnB w="6350" cap="flat" cmpd="sng" algn="ctr">
                       <a:solidFill>
-                        <a:srgbClr val="E8E8E8"/>
+                        <a:srgbClr val="E0E0E0"/>
                       </a:solidFill>
                       <a:prstDash val="solid"/>
                       <a:round/>
                       <a:headEnd type="none" w="med" len="med"/>
                       <a:tailEnd type="none" w="med" len="med"/>
                     </a:lnB>
+                    <a:solidFill>
+                      <a:srgbClr val="FFFFFF"/>
+                    </a:solidFill>
                   </a:tcPr>
                 </a:tc>
                 <a:tc>
@@ -2330,49 +1870,70 @@
                     <a:bodyPr/>
                     <a:lstStyle/>
                     <a:p>
-                      <a:pPr algn="ctr" indent="0" marL="0">
-                        <a:buNone/>
-                      </a:pPr>
-                      <a:r>
-                        <a:rPr lang="en-US" sz="800" dirty="0">
-                          <a:solidFill>
-                            <a:srgbClr val="404040"/>
-                          </a:solidFill>
-                          <a:latin typeface="Calibri" pitchFamily="34" charset="0"/>
-                          <a:ea typeface="Calibri" pitchFamily="34" charset="-122"/>
-                          <a:cs typeface="Calibri" pitchFamily="34" charset="-120"/>
-                        </a:rPr>
-                        <a:t>2.0</a:t>
-                      </a:r>
-                      <a:endParaRPr lang="en-US" sz="800" dirty="0">
+                      <a:pPr indent="0" marL="0">
+                        <a:buNone/>
+                      </a:pPr>
+                      <a:r>
+                        <a:rPr lang="en-US" sz="1000" dirty="0">
+                          <a:solidFill>
+                            <a:srgbClr val="333333"/>
+                          </a:solidFill>
+                          <a:latin typeface="Calibri" pitchFamily="34" charset="0"/>
+                          <a:ea typeface="Calibri" pitchFamily="34" charset="-122"/>
+                          <a:cs typeface="Calibri" pitchFamily="34" charset="-120"/>
+                        </a:rPr>
+                        <a:t>~1-3</a:t>
+                      </a:r>
+                      <a:endParaRPr lang="en-US" sz="1000" dirty="0">
+                        <a:latin typeface="Calibri" charset="0"/>
+                        <a:ea typeface="Calibri" charset="0"/>
+                        <a:cs typeface="Calibri" charset="0"/>
+                      </a:endParaRPr>
+                    </a:p>
+                    <a:p>
+                      <a:pPr indent="0" marL="0">
+                        <a:buNone/>
+                      </a:pPr>
+                      <a:r>
+                        <a:rPr lang="en-US" sz="1000" dirty="0">
+                          <a:solidFill>
+                            <a:srgbClr val="333333"/>
+                          </a:solidFill>
+                          <a:latin typeface="Calibri" pitchFamily="34" charset="0"/>
+                          <a:ea typeface="Calibri" pitchFamily="34" charset="-122"/>
+                          <a:cs typeface="Calibri" pitchFamily="34" charset="-120"/>
+                        </a:rPr>
+                        <a:t>(most CO2 stored)</a:t>
+                      </a:r>
+                      <a:endParaRPr lang="en-US" sz="1000" dirty="0">
                         <a:latin typeface="Calibri" charset="0"/>
                         <a:ea typeface="Calibri" charset="0"/>
                         <a:cs typeface="Calibri" charset="0"/>
                       </a:endParaRPr>
                     </a:p>
                   </a:txBody>
-                  <a:tcPr marL="50800" marR="50800" marT="25400" marB="25400" anchor="ctr">
-                    <a:lnL w="0" cap="flat" cmpd="sng" algn="ctr">
-                      <a:solidFill>
-                        <a:srgbClr val="FFFFFF"/>
+                  <a:tcPr marL="91440" marR="91440" marT="45720" marB="45720" anchor="ctr">
+                    <a:lnL w="6350" cap="flat" cmpd="sng" algn="ctr">
+                      <a:solidFill>
+                        <a:srgbClr val="E0E0E0"/>
                       </a:solidFill>
                       <a:prstDash val="solid"/>
                       <a:round/>
                       <a:headEnd type="none" w="med" len="med"/>
                       <a:tailEnd type="none" w="med" len="med"/>
                     </a:lnL>
-                    <a:lnR w="0" cap="flat" cmpd="sng" algn="ctr">
-                      <a:solidFill>
-                        <a:srgbClr val="FFFFFF"/>
+                    <a:lnR w="6350" cap="flat" cmpd="sng" algn="ctr">
+                      <a:solidFill>
+                        <a:srgbClr val="E0E0E0"/>
                       </a:solidFill>
                       <a:prstDash val="solid"/>
                       <a:round/>
                       <a:headEnd type="none" w="med" len="med"/>
                       <a:tailEnd type="none" w="med" len="med"/>
                     </a:lnR>
-                    <a:lnT w="0" cap="flat" cmpd="sng" algn="ctr">
-                      <a:solidFill>
-                        <a:srgbClr val="E8E8E8"/>
+                    <a:lnT w="6350" cap="flat" cmpd="sng" algn="ctr">
+                      <a:solidFill>
+                        <a:srgbClr val="E0E0E0"/>
                       </a:solidFill>
                       <a:prstDash val="solid"/>
                       <a:round/>
@@ -2381,13 +1942,16 @@
                     </a:lnT>
                     <a:lnB w="6350" cap="flat" cmpd="sng" algn="ctr">
                       <a:solidFill>
-                        <a:srgbClr val="E8E8E8"/>
+                        <a:srgbClr val="E0E0E0"/>
                       </a:solidFill>
                       <a:prstDash val="solid"/>
                       <a:round/>
                       <a:headEnd type="none" w="med" len="med"/>
                       <a:tailEnd type="none" w="med" len="med"/>
                     </a:lnB>
+                    <a:solidFill>
+                      <a:srgbClr val="EBF5FB"/>
+                    </a:solidFill>
                   </a:tcPr>
                 </a:tc>
                 <a:tc>
@@ -2395,49 +1959,70 @@
                     <a:bodyPr/>
                     <a:lstStyle/>
                     <a:p>
-                      <a:pPr algn="ctr" indent="0" marL="0">
-                        <a:buNone/>
-                      </a:pPr>
-                      <a:r>
-                        <a:rPr lang="en-US" sz="800" dirty="0">
-                          <a:solidFill>
-                            <a:srgbClr val="404040"/>
-                          </a:solidFill>
-                          <a:latin typeface="Calibri" pitchFamily="34" charset="0"/>
-                          <a:ea typeface="Calibri" pitchFamily="34" charset="-122"/>
-                          <a:cs typeface="Calibri" pitchFamily="34" charset="-120"/>
-                        </a:rPr>
-                        <a:t>3–4</a:t>
-                      </a:r>
-                      <a:endParaRPr lang="en-US" sz="800" dirty="0">
+                      <a:pPr indent="0" marL="0">
+                        <a:buNone/>
+                      </a:pPr>
+                      <a:r>
+                        <a:rPr lang="en-US" sz="1000" dirty="0">
+                          <a:solidFill>
+                            <a:srgbClr val="333333"/>
+                          </a:solidFill>
+                          <a:latin typeface="Calibri" pitchFamily="34" charset="0"/>
+                          <a:ea typeface="Calibri" pitchFamily="34" charset="-122"/>
+                          <a:cs typeface="Calibri" pitchFamily="34" charset="-120"/>
+                        </a:rPr>
+                        <a:t>~0</a:t>
+                      </a:r>
+                      <a:endParaRPr lang="en-US" sz="1000" dirty="0">
+                        <a:latin typeface="Calibri" charset="0"/>
+                        <a:ea typeface="Calibri" charset="0"/>
+                        <a:cs typeface="Calibri" charset="0"/>
+                      </a:endParaRPr>
+                    </a:p>
+                    <a:p>
+                      <a:pPr indent="0" marL="0">
+                        <a:buNone/>
+                      </a:pPr>
+                      <a:r>
+                        <a:rPr lang="en-US" sz="1000" dirty="0">
+                          <a:solidFill>
+                            <a:srgbClr val="333333"/>
+                          </a:solidFill>
+                          <a:latin typeface="Calibri" pitchFamily="34" charset="0"/>
+                          <a:ea typeface="Calibri" pitchFamily="34" charset="-122"/>
+                          <a:cs typeface="Calibri" pitchFamily="34" charset="-120"/>
+                        </a:rPr>
+                        <a:t>(assuming green electricity mix²)</a:t>
+                      </a:r>
+                      <a:endParaRPr lang="en-US" sz="1000" dirty="0">
                         <a:latin typeface="Calibri" charset="0"/>
                         <a:ea typeface="Calibri" charset="0"/>
                         <a:cs typeface="Calibri" charset="0"/>
                       </a:endParaRPr>
                     </a:p>
                   </a:txBody>
-                  <a:tcPr marL="50800" marR="50800" marT="25400" marB="25400" anchor="ctr">
-                    <a:lnL w="0" cap="flat" cmpd="sng" algn="ctr">
-                      <a:solidFill>
-                        <a:srgbClr val="FFFFFF"/>
+                  <a:tcPr marL="91440" marR="91440" marT="45720" marB="45720" anchor="ctr">
+                    <a:lnL w="6350" cap="flat" cmpd="sng" algn="ctr">
+                      <a:solidFill>
+                        <a:srgbClr val="E0E0E0"/>
                       </a:solidFill>
                       <a:prstDash val="solid"/>
                       <a:round/>
                       <a:headEnd type="none" w="med" len="med"/>
                       <a:tailEnd type="none" w="med" len="med"/>
                     </a:lnL>
-                    <a:lnR w="0" cap="flat" cmpd="sng" algn="ctr">
-                      <a:solidFill>
-                        <a:srgbClr val="FFFFFF"/>
+                    <a:lnR w="6350" cap="flat" cmpd="sng" algn="ctr">
+                      <a:solidFill>
+                        <a:srgbClr val="E0E0E0"/>
                       </a:solidFill>
                       <a:prstDash val="solid"/>
                       <a:round/>
                       <a:headEnd type="none" w="med" len="med"/>
                       <a:tailEnd type="none" w="med" len="med"/>
                     </a:lnR>
-                    <a:lnT w="0" cap="flat" cmpd="sng" algn="ctr">
-                      <a:solidFill>
-                        <a:srgbClr val="E8E8E8"/>
+                    <a:lnT w="6350" cap="flat" cmpd="sng" algn="ctr">
+                      <a:solidFill>
+                        <a:srgbClr val="E0E0E0"/>
                       </a:solidFill>
                       <a:prstDash val="solid"/>
                       <a:round/>
@@ -2446,13 +2031,107 @@
                     </a:lnT>
                     <a:lnB w="6350" cap="flat" cmpd="sng" algn="ctr">
                       <a:solidFill>
-                        <a:srgbClr val="E8E8E8"/>
+                        <a:srgbClr val="E0E0E0"/>
                       </a:solidFill>
                       <a:prstDash val="solid"/>
                       <a:round/>
                       <a:headEnd type="none" w="med" len="med"/>
                       <a:tailEnd type="none" w="med" len="med"/>
                     </a:lnB>
+                    <a:solidFill>
+                      <a:srgbClr val="EAFAF1"/>
+                    </a:solidFill>
+                  </a:tcPr>
+                </a:tc>
+              </a:tr>
+              <a:tr h="640080">
+                <a:tc>
+                  <a:txBody>
+                    <a:bodyPr/>
+                    <a:lstStyle/>
+                    <a:p>
+                      <a:pPr indent="0" marL="0">
+                        <a:buNone/>
+                      </a:pPr>
+                      <a:r>
+                        <a:rPr lang="en-US" sz="1000" b="1" dirty="0">
+                          <a:solidFill>
+                            <a:srgbClr val="000000"/>
+                          </a:solidFill>
+                          <a:latin typeface="Calibri" pitchFamily="34" charset="0"/>
+                          <a:ea typeface="Calibri" pitchFamily="34" charset="-122"/>
+                          <a:cs typeface="Calibri" pitchFamily="34" charset="-120"/>
+                        </a:rPr>
+                        <a:t>Investments</a:t>
+                      </a:r>
+                      <a:endParaRPr lang="en-US" sz="1000" dirty="0">
+                        <a:latin typeface="Calibri" charset="0"/>
+                        <a:ea typeface="Calibri" charset="0"/>
+                        <a:cs typeface="Calibri" charset="0"/>
+                      </a:endParaRPr>
+                    </a:p>
+                    <a:p>
+                      <a:pPr indent="0" marL="0">
+                        <a:buNone/>
+                      </a:pPr>
+                      <a:r>
+                        <a:rPr lang="en-US" sz="1000" b="1" dirty="0">
+                          <a:solidFill>
+                            <a:srgbClr val="000000"/>
+                          </a:solidFill>
+                          <a:latin typeface="Calibri" pitchFamily="34" charset="0"/>
+                          <a:ea typeface="Calibri" pitchFamily="34" charset="-122"/>
+                          <a:cs typeface="Calibri" pitchFamily="34" charset="-120"/>
+                        </a:rPr>
+                        <a:t>and complexity</a:t>
+                      </a:r>
+                      <a:endParaRPr lang="en-US" sz="1000" dirty="0">
+                        <a:latin typeface="Calibri" charset="0"/>
+                        <a:ea typeface="Calibri" charset="0"/>
+                        <a:cs typeface="Calibri" charset="0"/>
+                      </a:endParaRPr>
+                    </a:p>
+                  </a:txBody>
+                  <a:tcPr marL="91440" marR="91440" marT="45720" marB="45720" anchor="ctr">
+                    <a:lnL w="6350" cap="flat" cmpd="sng" algn="ctr">
+                      <a:solidFill>
+                        <a:srgbClr val="E0E0E0"/>
+                      </a:solidFill>
+                      <a:prstDash val="solid"/>
+                      <a:round/>
+                      <a:headEnd type="none" w="med" len="med"/>
+                      <a:tailEnd type="none" w="med" len="med"/>
+                    </a:lnL>
+                    <a:lnR w="6350" cap="flat" cmpd="sng" algn="ctr">
+                      <a:solidFill>
+                        <a:srgbClr val="E0E0E0"/>
+                      </a:solidFill>
+                      <a:prstDash val="solid"/>
+                      <a:round/>
+                      <a:headEnd type="none" w="med" len="med"/>
+                      <a:tailEnd type="none" w="med" len="med"/>
+                    </a:lnR>
+                    <a:lnT w="6350" cap="flat" cmpd="sng" algn="ctr">
+                      <a:solidFill>
+                        <a:srgbClr val="E0E0E0"/>
+                      </a:solidFill>
+                      <a:prstDash val="solid"/>
+                      <a:round/>
+                      <a:headEnd type="none" w="med" len="med"/>
+                      <a:tailEnd type="none" w="med" len="med"/>
+                    </a:lnT>
+                    <a:lnB w="6350" cap="flat" cmpd="sng" algn="ctr">
+                      <a:solidFill>
+                        <a:srgbClr val="E0E0E0"/>
+                      </a:solidFill>
+                      <a:prstDash val="solid"/>
+                      <a:round/>
+                      <a:headEnd type="none" w="med" len="med"/>
+                      <a:tailEnd type="none" w="med" len="med"/>
+                    </a:lnB>
+                    <a:solidFill>
+                      <a:srgbClr val="FFFFFF"/>
+                    </a:solidFill>
                   </a:tcPr>
                 </a:tc>
                 <a:tc>
@@ -2460,49 +2139,91 @@
                     <a:bodyPr/>
                     <a:lstStyle/>
                     <a:p>
-                      <a:pPr algn="ctr" indent="0" marL="0">
-                        <a:buNone/>
-                      </a:pPr>
-                      <a:r>
-                        <a:rPr lang="en-US" sz="800" dirty="0">
-                          <a:solidFill>
-                            <a:srgbClr val="404040"/>
-                          </a:solidFill>
-                          <a:latin typeface="Calibri" pitchFamily="34" charset="0"/>
-                          <a:ea typeface="Calibri" pitchFamily="34" charset="-122"/>
-                          <a:cs typeface="Calibri" pitchFamily="34" charset="-120"/>
-                        </a:rPr>
-                        <a:t>6–8</a:t>
-                      </a:r>
-                      <a:endParaRPr lang="en-US" sz="800" dirty="0">
+                      <a:pPr indent="0" marL="0">
+                        <a:buNone/>
+                      </a:pPr>
+                      <a:r>
+                        <a:rPr lang="en-US" sz="1000" dirty="0">
+                          <a:solidFill>
+                            <a:srgbClr val="333333"/>
+                          </a:solidFill>
+                          <a:latin typeface="Calibri" pitchFamily="34" charset="0"/>
+                          <a:ea typeface="Calibri" pitchFamily="34" charset="-122"/>
+                          <a:cs typeface="Calibri" pitchFamily="34" charset="-120"/>
+                        </a:rPr>
+                        <a:t>Large scale, one-off facilities</a:t>
+                      </a:r>
+                      <a:endParaRPr lang="en-US" sz="1000" dirty="0">
+                        <a:latin typeface="Calibri" charset="0"/>
+                        <a:ea typeface="Calibri" charset="0"/>
+                        <a:cs typeface="Calibri" charset="0"/>
+                      </a:endParaRPr>
+                    </a:p>
+                    <a:p>
+                      <a:pPr indent="0" marL="0">
+                        <a:buNone/>
+                      </a:pPr>
+                      <a:r>
+                        <a:rPr lang="en-US" sz="1000" dirty="0">
+                          <a:solidFill>
+                            <a:srgbClr val="333333"/>
+                          </a:solidFill>
+                          <a:latin typeface="Calibri" pitchFamily="34" charset="0"/>
+                          <a:ea typeface="Calibri" pitchFamily="34" charset="-122"/>
+                          <a:cs typeface="Calibri" pitchFamily="34" charset="-120"/>
+                        </a:rPr>
+                        <a:t>Requiring triple-digit million</a:t>
+                      </a:r>
+                      <a:endParaRPr lang="en-US" sz="1000" dirty="0">
+                        <a:latin typeface="Calibri" charset="0"/>
+                        <a:ea typeface="Calibri" charset="0"/>
+                        <a:cs typeface="Calibri" charset="0"/>
+                      </a:endParaRPr>
+                    </a:p>
+                    <a:p>
+                      <a:pPr indent="0" marL="0">
+                        <a:buNone/>
+                      </a:pPr>
+                      <a:r>
+                        <a:rPr lang="en-US" sz="1000" dirty="0">
+                          <a:solidFill>
+                            <a:srgbClr val="333333"/>
+                          </a:solidFill>
+                          <a:latin typeface="Calibri" pitchFamily="34" charset="0"/>
+                          <a:ea typeface="Calibri" pitchFamily="34" charset="-122"/>
+                          <a:cs typeface="Calibri" pitchFamily="34" charset="-120"/>
+                        </a:rPr>
+                        <a:t>EUR CAPEX per facility</a:t>
+                      </a:r>
+                      <a:endParaRPr lang="en-US" sz="1000" dirty="0">
                         <a:latin typeface="Calibri" charset="0"/>
                         <a:ea typeface="Calibri" charset="0"/>
                         <a:cs typeface="Calibri" charset="0"/>
                       </a:endParaRPr>
                     </a:p>
                   </a:txBody>
-                  <a:tcPr marL="50800" marR="50800" marT="25400" marB="25400" anchor="ctr">
-                    <a:lnL w="0" cap="flat" cmpd="sng" algn="ctr">
-                      <a:solidFill>
-                        <a:srgbClr val="FFFFFF"/>
+                  <a:tcPr marL="91440" marR="91440" marT="45720" marB="45720" anchor="ctr">
+                    <a:lnL w="6350" cap="flat" cmpd="sng" algn="ctr">
+                      <a:solidFill>
+                        <a:srgbClr val="E0E0E0"/>
                       </a:solidFill>
                       <a:prstDash val="solid"/>
                       <a:round/>
                       <a:headEnd type="none" w="med" len="med"/>
                       <a:tailEnd type="none" w="med" len="med"/>
                     </a:lnL>
-                    <a:lnR w="0" cap="flat" cmpd="sng" algn="ctr">
-                      <a:solidFill>
-                        <a:srgbClr val="FFFFFF"/>
+                    <a:lnR w="6350" cap="flat" cmpd="sng" algn="ctr">
+                      <a:solidFill>
+                        <a:srgbClr val="E0E0E0"/>
                       </a:solidFill>
                       <a:prstDash val="solid"/>
                       <a:round/>
                       <a:headEnd type="none" w="med" len="med"/>
                       <a:tailEnd type="none" w="med" len="med"/>
                     </a:lnR>
-                    <a:lnT w="0" cap="flat" cmpd="sng" algn="ctr">
-                      <a:solidFill>
-                        <a:srgbClr val="E8E8E8"/>
+                    <a:lnT w="6350" cap="flat" cmpd="sng" algn="ctr">
+                      <a:solidFill>
+                        <a:srgbClr val="E0E0E0"/>
                       </a:solidFill>
                       <a:prstDash val="solid"/>
                       <a:round/>
@@ -2511,80 +2232,16 @@
                     </a:lnT>
                     <a:lnB w="6350" cap="flat" cmpd="sng" algn="ctr">
                       <a:solidFill>
-                        <a:srgbClr val="E8E8E8"/>
+                        <a:srgbClr val="E0E0E0"/>
                       </a:solidFill>
                       <a:prstDash val="solid"/>
                       <a:round/>
                       <a:headEnd type="none" w="med" len="med"/>
                       <a:tailEnd type="none" w="med" len="med"/>
                     </a:lnB>
-                  </a:tcPr>
-                </a:tc>
-              </a:tr>
-              <a:tr h="256032">
-                <a:tc>
-                  <a:txBody>
-                    <a:bodyPr/>
-                    <a:lstStyle/>
-                    <a:p>
-                      <a:pPr algn="l" indent="0" marL="0">
-                        <a:buNone/>
-                      </a:pPr>
-                      <a:r>
-                        <a:rPr lang="en-US" sz="800" b="1" dirty="0">
-                          <a:solidFill>
-                            <a:srgbClr val="404040"/>
-                          </a:solidFill>
-                          <a:latin typeface="Calibri" pitchFamily="34" charset="0"/>
-                          <a:ea typeface="Calibri" pitchFamily="34" charset="-122"/>
-                          <a:cs typeface="Calibri" pitchFamily="34" charset="-120"/>
-                        </a:rPr>
-                        <a:t>Green H2 Cost (€/kg)</a:t>
-                      </a:r>
-                      <a:endParaRPr lang="en-US" sz="800" dirty="0">
-                        <a:latin typeface="Calibri" charset="0"/>
-                        <a:ea typeface="Calibri" charset="0"/>
-                        <a:cs typeface="Calibri" charset="0"/>
-                      </a:endParaRPr>
-                    </a:p>
-                  </a:txBody>
-                  <a:tcPr marL="50800" marR="50800" marT="25400" marB="25400" anchor="ctr">
-                    <a:lnL w="0" cap="flat" cmpd="sng" algn="ctr">
-                      <a:solidFill>
-                        <a:srgbClr val="FFFFFF"/>
-                      </a:solidFill>
-                      <a:prstDash val="solid"/>
-                      <a:round/>
-                      <a:headEnd type="none" w="med" len="med"/>
-                      <a:tailEnd type="none" w="med" len="med"/>
-                    </a:lnL>
-                    <a:lnR w="0" cap="flat" cmpd="sng" algn="ctr">
-                      <a:solidFill>
-                        <a:srgbClr val="FFFFFF"/>
-                      </a:solidFill>
-                      <a:prstDash val="solid"/>
-                      <a:round/>
-                      <a:headEnd type="none" w="med" len="med"/>
-                      <a:tailEnd type="none" w="med" len="med"/>
-                    </a:lnR>
-                    <a:lnT w="0" cap="flat" cmpd="sng" algn="ctr">
-                      <a:solidFill>
-                        <a:srgbClr val="E8E8E8"/>
-                      </a:solidFill>
-                      <a:prstDash val="solid"/>
-                      <a:round/>
-                      <a:headEnd type="none" w="med" len="med"/>
-                      <a:tailEnd type="none" w="med" len="med"/>
-                    </a:lnT>
-                    <a:lnB w="6350" cap="flat" cmpd="sng" algn="ctr">
-                      <a:solidFill>
-                        <a:srgbClr val="E8E8E8"/>
-                      </a:solidFill>
-                      <a:prstDash val="solid"/>
-                      <a:round/>
-                      <a:headEnd type="none" w="med" len="med"/>
-                      <a:tailEnd type="none" w="med" len="med"/>
-                    </a:lnB>
+                    <a:solidFill>
+                      <a:srgbClr val="FFFFFF"/>
+                    </a:solidFill>
                   </a:tcPr>
                 </a:tc>
                 <a:tc>
@@ -2592,49 +2249,91 @@
                     <a:bodyPr/>
                     <a:lstStyle/>
                     <a:p>
-                      <a:pPr algn="ctr" indent="0" marL="0">
-                        <a:buNone/>
-                      </a:pPr>
-                      <a:r>
-                        <a:rPr lang="en-US" sz="800" dirty="0">
-                          <a:solidFill>
-                            <a:srgbClr val="404040"/>
-                          </a:solidFill>
-                          <a:latin typeface="Calibri" pitchFamily="34" charset="0"/>
-                          <a:ea typeface="Calibri" pitchFamily="34" charset="-122"/>
-                          <a:cs typeface="Calibri" pitchFamily="34" charset="-120"/>
-                        </a:rPr>
-                        <a:t>5.0–6.0</a:t>
-                      </a:r>
-                      <a:endParaRPr lang="en-US" sz="800" dirty="0">
+                      <a:pPr indent="0" marL="0">
+                        <a:buNone/>
+                      </a:pPr>
+                      <a:r>
+                        <a:rPr lang="en-US" sz="1000" dirty="0">
+                          <a:solidFill>
+                            <a:srgbClr val="333333"/>
+                          </a:solidFill>
+                          <a:latin typeface="Calibri" pitchFamily="34" charset="0"/>
+                          <a:ea typeface="Calibri" pitchFamily="34" charset="-122"/>
+                          <a:cs typeface="Calibri" pitchFamily="34" charset="-120"/>
+                        </a:rPr>
+                        <a:t>Large scale and one-off facilities</a:t>
+                      </a:r>
+                      <a:endParaRPr lang="en-US" sz="1000" dirty="0">
+                        <a:latin typeface="Calibri" charset="0"/>
+                        <a:ea typeface="Calibri" charset="0"/>
+                        <a:cs typeface="Calibri" charset="0"/>
+                      </a:endParaRPr>
+                    </a:p>
+                    <a:p>
+                      <a:pPr indent="0" marL="0">
+                        <a:buNone/>
+                      </a:pPr>
+                      <a:r>
+                        <a:rPr lang="en-US" sz="1000" dirty="0">
+                          <a:solidFill>
+                            <a:srgbClr val="333333"/>
+                          </a:solidFill>
+                          <a:latin typeface="Calibri" pitchFamily="34" charset="0"/>
+                          <a:ea typeface="Calibri" pitchFamily="34" charset="-122"/>
+                          <a:cs typeface="Calibri" pitchFamily="34" charset="-120"/>
+                        </a:rPr>
+                        <a:t>Requiring triple-digit mn EUR</a:t>
+                      </a:r>
+                      <a:endParaRPr lang="en-US" sz="1000" dirty="0">
+                        <a:latin typeface="Calibri" charset="0"/>
+                        <a:ea typeface="Calibri" charset="0"/>
+                        <a:cs typeface="Calibri" charset="0"/>
+                      </a:endParaRPr>
+                    </a:p>
+                    <a:p>
+                      <a:pPr indent="0" marL="0">
+                        <a:buNone/>
+                      </a:pPr>
+                      <a:r>
+                        <a:rPr lang="en-US" sz="1000" dirty="0">
+                          <a:solidFill>
+                            <a:srgbClr val="333333"/>
+                          </a:solidFill>
+                          <a:latin typeface="Calibri" pitchFamily="34" charset="0"/>
+                          <a:ea typeface="Calibri" pitchFamily="34" charset="-122"/>
+                          <a:cs typeface="Calibri" pitchFamily="34" charset="-120"/>
+                        </a:rPr>
+                        <a:t>CAPEX per facility</a:t>
+                      </a:r>
+                      <a:endParaRPr lang="en-US" sz="1000" dirty="0">
                         <a:latin typeface="Calibri" charset="0"/>
                         <a:ea typeface="Calibri" charset="0"/>
                         <a:cs typeface="Calibri" charset="0"/>
                       </a:endParaRPr>
                     </a:p>
                   </a:txBody>
-                  <a:tcPr marL="50800" marR="50800" marT="25400" marB="25400" anchor="ctr">
-                    <a:lnL w="0" cap="flat" cmpd="sng" algn="ctr">
-                      <a:solidFill>
-                        <a:srgbClr val="FFFFFF"/>
+                  <a:tcPr marL="91440" marR="91440" marT="45720" marB="45720" anchor="ctr">
+                    <a:lnL w="6350" cap="flat" cmpd="sng" algn="ctr">
+                      <a:solidFill>
+                        <a:srgbClr val="E0E0E0"/>
                       </a:solidFill>
                       <a:prstDash val="solid"/>
                       <a:round/>
                       <a:headEnd type="none" w="med" len="med"/>
                       <a:tailEnd type="none" w="med" len="med"/>
                     </a:lnL>
-                    <a:lnR w="0" cap="flat" cmpd="sng" algn="ctr">
-                      <a:solidFill>
-                        <a:srgbClr val="FFFFFF"/>
+                    <a:lnR w="6350" cap="flat" cmpd="sng" algn="ctr">
+                      <a:solidFill>
+                        <a:srgbClr val="E0E0E0"/>
                       </a:solidFill>
                       <a:prstDash val="solid"/>
                       <a:round/>
                       <a:headEnd type="none" w="med" len="med"/>
                       <a:tailEnd type="none" w="med" len="med"/>
                     </a:lnR>
-                    <a:lnT w="0" cap="flat" cmpd="sng" algn="ctr">
-                      <a:solidFill>
-                        <a:srgbClr val="E8E8E8"/>
+                    <a:lnT w="6350" cap="flat" cmpd="sng" algn="ctr">
+                      <a:solidFill>
+                        <a:srgbClr val="E0E0E0"/>
                       </a:solidFill>
                       <a:prstDash val="solid"/>
                       <a:round/>
@@ -2643,13 +2342,16 @@
                     </a:lnT>
                     <a:lnB w="6350" cap="flat" cmpd="sng" algn="ctr">
                       <a:solidFill>
-                        <a:srgbClr val="E8E8E8"/>
+                        <a:srgbClr val="E0E0E0"/>
                       </a:solidFill>
                       <a:prstDash val="solid"/>
                       <a:round/>
                       <a:headEnd type="none" w="med" len="med"/>
                       <a:tailEnd type="none" w="med" len="med"/>
                     </a:lnB>
+                    <a:solidFill>
+                      <a:srgbClr val="EBF5FB"/>
+                    </a:solidFill>
                   </a:tcPr>
                 </a:tc>
                 <a:tc>
@@ -2657,49 +2359,91 @@
                     <a:bodyPr/>
                     <a:lstStyle/>
                     <a:p>
-                      <a:pPr algn="ctr" indent="0" marL="0">
-                        <a:buNone/>
-                      </a:pPr>
-                      <a:r>
-                        <a:rPr lang="en-US" sz="800" dirty="0">
-                          <a:solidFill>
-                            <a:srgbClr val="404040"/>
-                          </a:solidFill>
-                          <a:latin typeface="Calibri" pitchFamily="34" charset="0"/>
-                          <a:ea typeface="Calibri" pitchFamily="34" charset="-122"/>
-                          <a:cs typeface="Calibri" pitchFamily="34" charset="-120"/>
-                        </a:rPr>
-                        <a:t>3.5–4.0</a:t>
-                      </a:r>
-                      <a:endParaRPr lang="en-US" sz="800" dirty="0">
+                      <a:pPr indent="0" marL="0">
+                        <a:buNone/>
+                      </a:pPr>
+                      <a:r>
+                        <a:rPr lang="en-US" sz="1000" dirty="0">
+                          <a:solidFill>
+                            <a:srgbClr val="333333"/>
+                          </a:solidFill>
+                          <a:latin typeface="Calibri" pitchFamily="34" charset="0"/>
+                          <a:ea typeface="Calibri" pitchFamily="34" charset="-122"/>
+                          <a:cs typeface="Calibri" pitchFamily="34" charset="-120"/>
+                        </a:rPr>
+                        <a:t>Small-scale (5-10MW) facilities</a:t>
+                      </a:r>
+                      <a:endParaRPr lang="en-US" sz="1000" dirty="0">
+                        <a:latin typeface="Calibri" charset="0"/>
+                        <a:ea typeface="Calibri" charset="0"/>
+                        <a:cs typeface="Calibri" charset="0"/>
+                      </a:endParaRPr>
+                    </a:p>
+                    <a:p>
+                      <a:pPr indent="0" marL="0">
+                        <a:buNone/>
+                      </a:pPr>
+                      <a:r>
+                        <a:rPr lang="en-US" sz="1000" dirty="0">
+                          <a:solidFill>
+                            <a:srgbClr val="333333"/>
+                          </a:solidFill>
+                          <a:latin typeface="Calibri" pitchFamily="34" charset="0"/>
+                          <a:ea typeface="Calibri" pitchFamily="34" charset="-122"/>
+                          <a:cs typeface="Calibri" pitchFamily="34" charset="-120"/>
+                        </a:rPr>
+                        <a:t>that can be replicated³</a:t>
+                      </a:r>
+                      <a:endParaRPr lang="en-US" sz="1000" dirty="0">
+                        <a:latin typeface="Calibri" charset="0"/>
+                        <a:ea typeface="Calibri" charset="0"/>
+                        <a:cs typeface="Calibri" charset="0"/>
+                      </a:endParaRPr>
+                    </a:p>
+                    <a:p>
+                      <a:pPr indent="0" marL="0">
+                        <a:buNone/>
+                      </a:pPr>
+                      <a:r>
+                        <a:rPr lang="en-US" sz="1000" dirty="0">
+                          <a:solidFill>
+                            <a:srgbClr val="333333"/>
+                          </a:solidFill>
+                          <a:latin typeface="Calibri" pitchFamily="34" charset="0"/>
+                          <a:ea typeface="Calibri" pitchFamily="34" charset="-122"/>
+                          <a:cs typeface="Calibri" pitchFamily="34" charset="-120"/>
+                        </a:rPr>
+                        <a:t>Single/double-digit mn EUR CAPEX</a:t>
+                      </a:r>
+                      <a:endParaRPr lang="en-US" sz="1000" dirty="0">
                         <a:latin typeface="Calibri" charset="0"/>
                         <a:ea typeface="Calibri" charset="0"/>
                         <a:cs typeface="Calibri" charset="0"/>
                       </a:endParaRPr>
                     </a:p>
                   </a:txBody>
-                  <a:tcPr marL="50800" marR="50800" marT="25400" marB="25400" anchor="ctr">
-                    <a:lnL w="0" cap="flat" cmpd="sng" algn="ctr">
-                      <a:solidFill>
-                        <a:srgbClr val="FFFFFF"/>
+                  <a:tcPr marL="91440" marR="91440" marT="45720" marB="45720" anchor="ctr">
+                    <a:lnL w="6350" cap="flat" cmpd="sng" algn="ctr">
+                      <a:solidFill>
+                        <a:srgbClr val="E0E0E0"/>
                       </a:solidFill>
                       <a:prstDash val="solid"/>
                       <a:round/>
                       <a:headEnd type="none" w="med" len="med"/>
                       <a:tailEnd type="none" w="med" len="med"/>
                     </a:lnL>
-                    <a:lnR w="0" cap="flat" cmpd="sng" algn="ctr">
-                      <a:solidFill>
-                        <a:srgbClr val="FFFFFF"/>
+                    <a:lnR w="6350" cap="flat" cmpd="sng" algn="ctr">
+                      <a:solidFill>
+                        <a:srgbClr val="E0E0E0"/>
                       </a:solidFill>
                       <a:prstDash val="solid"/>
                       <a:round/>
                       <a:headEnd type="none" w="med" len="med"/>
                       <a:tailEnd type="none" w="med" len="med"/>
                     </a:lnR>
-                    <a:lnT w="0" cap="flat" cmpd="sng" algn="ctr">
-                      <a:solidFill>
-                        <a:srgbClr val="E8E8E8"/>
+                    <a:lnT w="6350" cap="flat" cmpd="sng" algn="ctr">
+                      <a:solidFill>
+                        <a:srgbClr val="E0E0E0"/>
                       </a:solidFill>
                       <a:prstDash val="solid"/>
                       <a:round/>
@@ -2708,13 +2452,107 @@
                     </a:lnT>
                     <a:lnB w="6350" cap="flat" cmpd="sng" algn="ctr">
                       <a:solidFill>
-                        <a:srgbClr val="E8E8E8"/>
+                        <a:srgbClr val="E0E0E0"/>
                       </a:solidFill>
                       <a:prstDash val="solid"/>
                       <a:round/>
                       <a:headEnd type="none" w="med" len="med"/>
                       <a:tailEnd type="none" w="med" len="med"/>
                     </a:lnB>
+                    <a:solidFill>
+                      <a:srgbClr val="EAFAF1"/>
+                    </a:solidFill>
+                  </a:tcPr>
+                </a:tc>
+              </a:tr>
+              <a:tr h="548640">
+                <a:tc>
+                  <a:txBody>
+                    <a:bodyPr/>
+                    <a:lstStyle/>
+                    <a:p>
+                      <a:pPr indent="0" marL="0">
+                        <a:buNone/>
+                      </a:pPr>
+                      <a:r>
+                        <a:rPr lang="en-US" sz="1000" b="1" dirty="0">
+                          <a:solidFill>
+                            <a:srgbClr val="000000"/>
+                          </a:solidFill>
+                          <a:latin typeface="Calibri" pitchFamily="34" charset="0"/>
+                          <a:ea typeface="Calibri" pitchFamily="34" charset="-122"/>
+                          <a:cs typeface="Calibri" pitchFamily="34" charset="-120"/>
+                        </a:rPr>
+                        <a:t>EPC</a:t>
+                      </a:r>
+                      <a:endParaRPr lang="en-US" sz="1000" dirty="0">
+                        <a:latin typeface="Calibri" charset="0"/>
+                        <a:ea typeface="Calibri" charset="0"/>
+                        <a:cs typeface="Calibri" charset="0"/>
+                      </a:endParaRPr>
+                    </a:p>
+                    <a:p>
+                      <a:pPr indent="0" marL="0">
+                        <a:buNone/>
+                      </a:pPr>
+                      <a:r>
+                        <a:rPr lang="en-US" sz="1000" b="1" dirty="0">
+                          <a:solidFill>
+                            <a:srgbClr val="000000"/>
+                          </a:solidFill>
+                          <a:latin typeface="Calibri" pitchFamily="34" charset="0"/>
+                          <a:ea typeface="Calibri" pitchFamily="34" charset="-122"/>
+                          <a:cs typeface="Calibri" pitchFamily="34" charset="-120"/>
+                        </a:rPr>
+                        <a:t>duration</a:t>
+                      </a:r>
+                      <a:endParaRPr lang="en-US" sz="1000" dirty="0">
+                        <a:latin typeface="Calibri" charset="0"/>
+                        <a:ea typeface="Calibri" charset="0"/>
+                        <a:cs typeface="Calibri" charset="0"/>
+                      </a:endParaRPr>
+                    </a:p>
+                  </a:txBody>
+                  <a:tcPr marL="91440" marR="91440" marT="45720" marB="45720" anchor="ctr">
+                    <a:lnL w="6350" cap="flat" cmpd="sng" algn="ctr">
+                      <a:solidFill>
+                        <a:srgbClr val="E0E0E0"/>
+                      </a:solidFill>
+                      <a:prstDash val="solid"/>
+                      <a:round/>
+                      <a:headEnd type="none" w="med" len="med"/>
+                      <a:tailEnd type="none" w="med" len="med"/>
+                    </a:lnL>
+                    <a:lnR w="6350" cap="flat" cmpd="sng" algn="ctr">
+                      <a:solidFill>
+                        <a:srgbClr val="E0E0E0"/>
+                      </a:solidFill>
+                      <a:prstDash val="solid"/>
+                      <a:round/>
+                      <a:headEnd type="none" w="med" len="med"/>
+                      <a:tailEnd type="none" w="med" len="med"/>
+                    </a:lnR>
+                    <a:lnT w="6350" cap="flat" cmpd="sng" algn="ctr">
+                      <a:solidFill>
+                        <a:srgbClr val="E0E0E0"/>
+                      </a:solidFill>
+                      <a:prstDash val="solid"/>
+                      <a:round/>
+                      <a:headEnd type="none" w="med" len="med"/>
+                      <a:tailEnd type="none" w="med" len="med"/>
+                    </a:lnT>
+                    <a:lnB w="6350" cap="flat" cmpd="sng" algn="ctr">
+                      <a:solidFill>
+                        <a:srgbClr val="E0E0E0"/>
+                      </a:solidFill>
+                      <a:prstDash val="solid"/>
+                      <a:round/>
+                      <a:headEnd type="none" w="med" len="med"/>
+                      <a:tailEnd type="none" w="med" len="med"/>
+                    </a:lnB>
+                    <a:solidFill>
+                      <a:srgbClr val="FFFFFF"/>
+                    </a:solidFill>
                   </a:tcPr>
                 </a:tc>
                 <a:tc>
@@ -2722,49 +2560,49 @@
                     <a:bodyPr/>
                     <a:lstStyle/>
                     <a:p>
-                      <a:pPr algn="ctr" indent="0" marL="0">
-                        <a:buNone/>
-                      </a:pPr>
-                      <a:r>
-                        <a:rPr lang="en-US" sz="800" dirty="0">
-                          <a:solidFill>
-                            <a:srgbClr val="404040"/>
-                          </a:solidFill>
-                          <a:latin typeface="Calibri" pitchFamily="34" charset="0"/>
-                          <a:ea typeface="Calibri" pitchFamily="34" charset="-122"/>
-                          <a:cs typeface="Calibri" pitchFamily="34" charset="-120"/>
-                        </a:rPr>
-                        <a:t>2.5–3.0</a:t>
-                      </a:r>
-                      <a:endParaRPr lang="en-US" sz="800" dirty="0">
+                      <a:pPr indent="0" marL="0">
+                        <a:buNone/>
+                      </a:pPr>
+                      <a:r>
+                        <a:rPr lang="en-US" sz="1000" dirty="0">
+                          <a:solidFill>
+                            <a:srgbClr val="333333"/>
+                          </a:solidFill>
+                          <a:latin typeface="Calibri" pitchFamily="34" charset="0"/>
+                          <a:ea typeface="Calibri" pitchFamily="34" charset="-122"/>
+                          <a:cs typeface="Calibri" pitchFamily="34" charset="-120"/>
+                        </a:rPr>
+                        <a:t>3-5 years EPC</a:t>
+                      </a:r>
+                      <a:endParaRPr lang="en-US" sz="1000" dirty="0">
                         <a:latin typeface="Calibri" charset="0"/>
                         <a:ea typeface="Calibri" charset="0"/>
                         <a:cs typeface="Calibri" charset="0"/>
                       </a:endParaRPr>
                     </a:p>
                   </a:txBody>
-                  <a:tcPr marL="50800" marR="50800" marT="25400" marB="25400" anchor="ctr">
-                    <a:lnL w="0" cap="flat" cmpd="sng" algn="ctr">
-                      <a:solidFill>
-                        <a:srgbClr val="FFFFFF"/>
+                  <a:tcPr marL="91440" marR="91440" marT="45720" marB="45720" anchor="ctr">
+                    <a:lnL w="6350" cap="flat" cmpd="sng" algn="ctr">
+                      <a:solidFill>
+                        <a:srgbClr val="E0E0E0"/>
                       </a:solidFill>
                       <a:prstDash val="solid"/>
                       <a:round/>
                       <a:headEnd type="none" w="med" len="med"/>
                       <a:tailEnd type="none" w="med" len="med"/>
                     </a:lnL>
-                    <a:lnR w="0" cap="flat" cmpd="sng" algn="ctr">
-                      <a:solidFill>
-                        <a:srgbClr val="FFFFFF"/>
+                    <a:lnR w="6350" cap="flat" cmpd="sng" algn="ctr">
+                      <a:solidFill>
+                        <a:srgbClr val="E0E0E0"/>
                       </a:solidFill>
                       <a:prstDash val="solid"/>
                       <a:round/>
                       <a:headEnd type="none" w="med" len="med"/>
                       <a:tailEnd type="none" w="med" len="med"/>
                     </a:lnR>
-                    <a:lnT w="0" cap="flat" cmpd="sng" algn="ctr">
-                      <a:solidFill>
-                        <a:srgbClr val="E8E8E8"/>
+                    <a:lnT w="6350" cap="flat" cmpd="sng" algn="ctr">
+                      <a:solidFill>
+                        <a:srgbClr val="E0E0E0"/>
                       </a:solidFill>
                       <a:prstDash val="solid"/>
                       <a:round/>
@@ -2773,13 +2611,16 @@
                     </a:lnT>
                     <a:lnB w="6350" cap="flat" cmpd="sng" algn="ctr">
                       <a:solidFill>
-                        <a:srgbClr val="E8E8E8"/>
+                        <a:srgbClr val="E0E0E0"/>
                       </a:solidFill>
                       <a:prstDash val="solid"/>
                       <a:round/>
                       <a:headEnd type="none" w="med" len="med"/>
                       <a:tailEnd type="none" w="med" len="med"/>
                     </a:lnB>
+                    <a:solidFill>
+                      <a:srgbClr val="FFFFFF"/>
+                    </a:solidFill>
                   </a:tcPr>
                 </a:tc>
                 <a:tc>
@@ -2787,49 +2628,91 @@
                     <a:bodyPr/>
                     <a:lstStyle/>
                     <a:p>
-                      <a:pPr algn="ctr" indent="0" marL="0">
-                        <a:buNone/>
-                      </a:pPr>
-                      <a:r>
-                        <a:rPr lang="en-US" sz="800" dirty="0">
-                          <a:solidFill>
-                            <a:srgbClr val="404040"/>
-                          </a:solidFill>
-                          <a:latin typeface="Calibri" pitchFamily="34" charset="0"/>
-                          <a:ea typeface="Calibri" pitchFamily="34" charset="-122"/>
-                          <a:cs typeface="Calibri" pitchFamily="34" charset="-120"/>
-                        </a:rPr>
-                        <a:t>2.0–2.5</a:t>
-                      </a:r>
-                      <a:endParaRPr lang="en-US" sz="800" dirty="0">
+                      <a:pPr indent="0" marL="0">
+                        <a:buNone/>
+                      </a:pPr>
+                      <a:r>
+                        <a:rPr lang="en-US" sz="1000" dirty="0">
+                          <a:solidFill>
+                            <a:srgbClr val="333333"/>
+                          </a:solidFill>
+                          <a:latin typeface="Calibri" pitchFamily="34" charset="0"/>
+                          <a:ea typeface="Calibri" pitchFamily="34" charset="-122"/>
+                          <a:cs typeface="Calibri" pitchFamily="34" charset="-120"/>
+                        </a:rPr>
+                        <a:t>5-10+ years EPC duration,</a:t>
+                      </a:r>
+                      <a:endParaRPr lang="en-US" sz="1000" dirty="0">
+                        <a:latin typeface="Calibri" charset="0"/>
+                        <a:ea typeface="Calibri" charset="0"/>
+                        <a:cs typeface="Calibri" charset="0"/>
+                      </a:endParaRPr>
+                    </a:p>
+                    <a:p>
+                      <a:pPr indent="0" marL="0">
+                        <a:buNone/>
+                      </a:pPr>
+                      <a:r>
+                        <a:rPr lang="en-US" sz="1000" dirty="0">
+                          <a:solidFill>
+                            <a:srgbClr val="333333"/>
+                          </a:solidFill>
+                          <a:latin typeface="Calibri" pitchFamily="34" charset="0"/>
+                          <a:ea typeface="Calibri" pitchFamily="34" charset="-122"/>
+                          <a:cs typeface="Calibri" pitchFamily="34" charset="-120"/>
+                        </a:rPr>
+                        <a:t>contingent upon development</a:t>
+                      </a:r>
+                      <a:endParaRPr lang="en-US" sz="1000" dirty="0">
+                        <a:latin typeface="Calibri" charset="0"/>
+                        <a:ea typeface="Calibri" charset="0"/>
+                        <a:cs typeface="Calibri" charset="0"/>
+                      </a:endParaRPr>
+                    </a:p>
+                    <a:p>
+                      <a:pPr indent="0" marL="0">
+                        <a:buNone/>
+                      </a:pPr>
+                      <a:r>
+                        <a:rPr lang="en-US" sz="1000" dirty="0">
+                          <a:solidFill>
+                            <a:srgbClr val="333333"/>
+                          </a:solidFill>
+                          <a:latin typeface="Calibri" pitchFamily="34" charset="0"/>
+                          <a:ea typeface="Calibri" pitchFamily="34" charset="-122"/>
+                          <a:cs typeface="Calibri" pitchFamily="34" charset="-120"/>
+                        </a:rPr>
+                        <a:t>of CO2 storage site</a:t>
+                      </a:r>
+                      <a:endParaRPr lang="en-US" sz="1000" dirty="0">
                         <a:latin typeface="Calibri" charset="0"/>
                         <a:ea typeface="Calibri" charset="0"/>
                         <a:cs typeface="Calibri" charset="0"/>
                       </a:endParaRPr>
                     </a:p>
                   </a:txBody>
-                  <a:tcPr marL="50800" marR="50800" marT="25400" marB="25400" anchor="ctr">
-                    <a:lnL w="0" cap="flat" cmpd="sng" algn="ctr">
-                      <a:solidFill>
-                        <a:srgbClr val="FFFFFF"/>
+                  <a:tcPr marL="91440" marR="91440" marT="45720" marB="45720" anchor="ctr">
+                    <a:lnL w="6350" cap="flat" cmpd="sng" algn="ctr">
+                      <a:solidFill>
+                        <a:srgbClr val="E0E0E0"/>
                       </a:solidFill>
                       <a:prstDash val="solid"/>
                       <a:round/>
                       <a:headEnd type="none" w="med" len="med"/>
                       <a:tailEnd type="none" w="med" len="med"/>
                     </a:lnL>
-                    <a:lnR w="0" cap="flat" cmpd="sng" algn="ctr">
-                      <a:solidFill>
-                        <a:srgbClr val="FFFFFF"/>
+                    <a:lnR w="6350" cap="flat" cmpd="sng" algn="ctr">
+                      <a:solidFill>
+                        <a:srgbClr val="E0E0E0"/>
                       </a:solidFill>
                       <a:prstDash val="solid"/>
                       <a:round/>
                       <a:headEnd type="none" w="med" len="med"/>
                       <a:tailEnd type="none" w="med" len="med"/>
                     </a:lnR>
-                    <a:lnT w="0" cap="flat" cmpd="sng" algn="ctr">
-                      <a:solidFill>
-                        <a:srgbClr val="E8E8E8"/>
+                    <a:lnT w="6350" cap="flat" cmpd="sng" algn="ctr">
+                      <a:solidFill>
+                        <a:srgbClr val="E0E0E0"/>
                       </a:solidFill>
                       <a:prstDash val="solid"/>
                       <a:round/>
@@ -2838,13 +2721,16 @@
                     </a:lnT>
                     <a:lnB w="6350" cap="flat" cmpd="sng" algn="ctr">
                       <a:solidFill>
-                        <a:srgbClr val="E8E8E8"/>
+                        <a:srgbClr val="E0E0E0"/>
                       </a:solidFill>
                       <a:prstDash val="solid"/>
                       <a:round/>
                       <a:headEnd type="none" w="med" len="med"/>
                       <a:tailEnd type="none" w="med" len="med"/>
                     </a:lnB>
+                    <a:solidFill>
+                      <a:srgbClr val="EBF5FB"/>
+                    </a:solidFill>
                   </a:tcPr>
                 </a:tc>
                 <a:tc>
@@ -2852,49 +2738,49 @@
                     <a:bodyPr/>
                     <a:lstStyle/>
                     <a:p>
-                      <a:pPr algn="ctr" indent="0" marL="0">
-                        <a:buNone/>
-                      </a:pPr>
-                      <a:r>
-                        <a:rPr lang="en-US" sz="800" dirty="0">
-                          <a:solidFill>
-                            <a:srgbClr val="404040"/>
-                          </a:solidFill>
-                          <a:latin typeface="Calibri" pitchFamily="34" charset="0"/>
-                          <a:ea typeface="Calibri" pitchFamily="34" charset="-122"/>
-                          <a:cs typeface="Calibri" pitchFamily="34" charset="-120"/>
-                        </a:rPr>
-                        <a:t>1.5–2.0</a:t>
-                      </a:r>
-                      <a:endParaRPr lang="en-US" sz="800" dirty="0">
+                      <a:pPr indent="0" marL="0">
+                        <a:buNone/>
+                      </a:pPr>
+                      <a:r>
+                        <a:rPr lang="en-US" sz="1000" dirty="0">
+                          <a:solidFill>
+                            <a:srgbClr val="333333"/>
+                          </a:solidFill>
+                          <a:latin typeface="Calibri" pitchFamily="34" charset="0"/>
+                          <a:ea typeface="Calibri" pitchFamily="34" charset="-122"/>
+                          <a:cs typeface="Calibri" pitchFamily="34" charset="-120"/>
+                        </a:rPr>
+                        <a:t>1-3 years EPC duration</a:t>
+                      </a:r>
+                      <a:endParaRPr lang="en-US" sz="1000" dirty="0">
                         <a:latin typeface="Calibri" charset="0"/>
                         <a:ea typeface="Calibri" charset="0"/>
                         <a:cs typeface="Calibri" charset="0"/>
                       </a:endParaRPr>
                     </a:p>
                   </a:txBody>
-                  <a:tcPr marL="50800" marR="50800" marT="25400" marB="25400" anchor="ctr">
-                    <a:lnL w="0" cap="flat" cmpd="sng" algn="ctr">
-                      <a:solidFill>
-                        <a:srgbClr val="FFFFFF"/>
+                  <a:tcPr marL="91440" marR="91440" marT="45720" marB="45720" anchor="ctr">
+                    <a:lnL w="6350" cap="flat" cmpd="sng" algn="ctr">
+                      <a:solidFill>
+                        <a:srgbClr val="E0E0E0"/>
                       </a:solidFill>
                       <a:prstDash val="solid"/>
                       <a:round/>
                       <a:headEnd type="none" w="med" len="med"/>
                       <a:tailEnd type="none" w="med" len="med"/>
                     </a:lnL>
-                    <a:lnR w="0" cap="flat" cmpd="sng" algn="ctr">
-                      <a:solidFill>
-                        <a:srgbClr val="FFFFFF"/>
+                    <a:lnR w="6350" cap="flat" cmpd="sng" algn="ctr">
+                      <a:solidFill>
+                        <a:srgbClr val="E0E0E0"/>
                       </a:solidFill>
                       <a:prstDash val="solid"/>
                       <a:round/>
                       <a:headEnd type="none" w="med" len="med"/>
                       <a:tailEnd type="none" w="med" len="med"/>
                     </a:lnR>
-                    <a:lnT w="0" cap="flat" cmpd="sng" algn="ctr">
-                      <a:solidFill>
-                        <a:srgbClr val="E8E8E8"/>
+                    <a:lnT w="6350" cap="flat" cmpd="sng" algn="ctr">
+                      <a:solidFill>
+                        <a:srgbClr val="E0E0E0"/>
                       </a:solidFill>
                       <a:prstDash val="solid"/>
                       <a:round/>
@@ -2903,65 +2789,89 @@
                     </a:lnT>
                     <a:lnB w="6350" cap="flat" cmpd="sng" algn="ctr">
                       <a:solidFill>
-                        <a:srgbClr val="E8E8E8"/>
+                        <a:srgbClr val="E0E0E0"/>
                       </a:solidFill>
                       <a:prstDash val="solid"/>
                       <a:round/>
                       <a:headEnd type="none" w="med" len="med"/>
                       <a:tailEnd type="none" w="med" len="med"/>
                     </a:lnB>
+                    <a:solidFill>
+                      <a:srgbClr val="EAFAF1"/>
+                    </a:solidFill>
                   </a:tcPr>
                 </a:tc>
               </a:tr>
-              <a:tr h="256032">
+              <a:tr h="365760">
                 <a:tc>
                   <a:txBody>
                     <a:bodyPr/>
                     <a:lstStyle/>
                     <a:p>
-                      <a:pPr algn="l" indent="0" marL="0">
-                        <a:buNone/>
-                      </a:pPr>
-                      <a:r>
-                        <a:rPr lang="en-US" sz="800" b="1" dirty="0">
-                          <a:solidFill>
-                            <a:srgbClr val="404040"/>
-                          </a:solidFill>
-                          <a:latin typeface="Calibri" pitchFamily="34" charset="0"/>
-                          <a:ea typeface="Calibri" pitchFamily="34" charset="-122"/>
-                          <a:cs typeface="Calibri" pitchFamily="34" charset="-120"/>
-                        </a:rPr>
-                        <a:t>H2 Production (kt/yr)</a:t>
-                      </a:r>
-                      <a:endParaRPr lang="en-US" sz="800" dirty="0">
+                      <a:pPr indent="0" marL="0">
+                        <a:buNone/>
+                      </a:pPr>
+                      <a:r>
+                        <a:rPr lang="en-US" sz="1000" b="1" dirty="0">
+                          <a:solidFill>
+                            <a:srgbClr val="000000"/>
+                          </a:solidFill>
+                          <a:latin typeface="Calibri" pitchFamily="34" charset="0"/>
+                          <a:ea typeface="Calibri" pitchFamily="34" charset="-122"/>
+                          <a:cs typeface="Calibri" pitchFamily="34" charset="-120"/>
+                        </a:rPr>
+                        <a:t>Direct link to</a:t>
+                      </a:r>
+                      <a:endParaRPr lang="en-US" sz="1000" dirty="0">
+                        <a:latin typeface="Calibri" charset="0"/>
+                        <a:ea typeface="Calibri" charset="0"/>
+                        <a:cs typeface="Calibri" charset="0"/>
+                      </a:endParaRPr>
+                    </a:p>
+                    <a:p>
+                      <a:pPr indent="0" marL="0">
+                        <a:buNone/>
+                      </a:pPr>
+                      <a:r>
+                        <a:rPr lang="en-US" sz="1000" b="1" dirty="0">
+                          <a:solidFill>
+                            <a:srgbClr val="000000"/>
+                          </a:solidFill>
+                          <a:latin typeface="Calibri" pitchFamily="34" charset="0"/>
+                          <a:ea typeface="Calibri" pitchFamily="34" charset="-122"/>
+                          <a:cs typeface="Calibri" pitchFamily="34" charset="-120"/>
+                        </a:rPr>
+                        <a:t>power sector</a:t>
+                      </a:r>
+                      <a:endParaRPr lang="en-US" sz="1000" dirty="0">
                         <a:latin typeface="Calibri" charset="0"/>
                         <a:ea typeface="Calibri" charset="0"/>
                         <a:cs typeface="Calibri" charset="0"/>
                       </a:endParaRPr>
                     </a:p>
                   </a:txBody>
-                  <a:tcPr marL="50800" marR="50800" marT="25400" marB="25400" anchor="ctr">
-                    <a:lnL w="0" cap="flat" cmpd="sng" algn="ctr">
-                      <a:solidFill>
-                        <a:srgbClr val="FFFFFF"/>
+                  <a:tcPr marL="91440" marR="91440" marT="45720" marB="45720" anchor="ctr">
+                    <a:lnL w="6350" cap="flat" cmpd="sng" algn="ctr">
+                      <a:solidFill>
+                        <a:srgbClr val="E0E0E0"/>
                       </a:solidFill>
                       <a:prstDash val="solid"/>
                       <a:round/>
                       <a:headEnd type="none" w="med" len="med"/>
                       <a:tailEnd type="none" w="med" len="med"/>
                     </a:lnL>
-                    <a:lnR w="0" cap="flat" cmpd="sng" algn="ctr">
-                      <a:solidFill>
-                        <a:srgbClr val="FFFFFF"/>
+                    <a:lnR w="6350" cap="flat" cmpd="sng" algn="ctr">
+                      <a:solidFill>
+                        <a:srgbClr val="E0E0E0"/>
                       </a:solidFill>
                       <a:prstDash val="solid"/>
                       <a:round/>
                       <a:headEnd type="none" w="med" len="med"/>
                       <a:tailEnd type="none" w="med" len="med"/>
                     </a:lnR>
-                    <a:lnT w="0" cap="flat" cmpd="sng" algn="ctr">
-                      <a:solidFill>
-                        <a:srgbClr val="E8E8E8"/>
+                    <a:lnT w="6350" cap="flat" cmpd="sng" algn="ctr">
+                      <a:solidFill>
+                        <a:srgbClr val="E0E0E0"/>
                       </a:solidFill>
                       <a:prstDash val="solid"/>
                       <a:round/>
@@ -2970,13 +2880,16 @@
                     </a:lnT>
                     <a:lnB w="6350" cap="flat" cmpd="sng" algn="ctr">
                       <a:solidFill>
-                        <a:srgbClr val="E8E8E8"/>
+                        <a:srgbClr val="E0E0E0"/>
                       </a:solidFill>
                       <a:prstDash val="solid"/>
                       <a:round/>
                       <a:headEnd type="none" w="med" len="med"/>
                       <a:tailEnd type="none" w="med" len="med"/>
                     </a:lnB>
+                    <a:solidFill>
+                      <a:srgbClr val="FFFFFF"/>
+                    </a:solidFill>
                   </a:tcPr>
                 </a:tc>
                 <a:tc>
@@ -2984,49 +2897,49 @@
                     <a:bodyPr/>
                     <a:lstStyle/>
                     <a:p>
-                      <a:pPr algn="ctr" indent="0" marL="0">
-                        <a:buNone/>
-                      </a:pPr>
-                      <a:r>
-                        <a:rPr lang="en-US" sz="800" dirty="0">
-                          <a:solidFill>
-                            <a:srgbClr val="404040"/>
-                          </a:solidFill>
-                          <a:latin typeface="Calibri" pitchFamily="34" charset="0"/>
-                          <a:ea typeface="Calibri" pitchFamily="34" charset="-122"/>
-                          <a:cs typeface="Calibri" pitchFamily="34" charset="-120"/>
-                        </a:rPr>
-                        <a:t>&lt; 10</a:t>
-                      </a:r>
-                      <a:endParaRPr lang="en-US" sz="800" dirty="0">
+                      <a:pPr indent="0" marL="0">
+                        <a:buNone/>
+                      </a:pPr>
+                      <a:r>
+                        <a:rPr lang="en-US" sz="1000" dirty="0">
+                          <a:solidFill>
+                            <a:srgbClr val="333333"/>
+                          </a:solidFill>
+                          <a:latin typeface="Calibri" pitchFamily="34" charset="0"/>
+                          <a:ea typeface="Calibri" pitchFamily="34" charset="-122"/>
+                          <a:cs typeface="Calibri" pitchFamily="34" charset="-120"/>
+                        </a:rPr>
+                        <a:t>X</a:t>
+                      </a:r>
+                      <a:endParaRPr lang="en-US" sz="1000" dirty="0">
                         <a:latin typeface="Calibri" charset="0"/>
                         <a:ea typeface="Calibri" charset="0"/>
                         <a:cs typeface="Calibri" charset="0"/>
                       </a:endParaRPr>
                     </a:p>
                   </a:txBody>
-                  <a:tcPr marL="50800" marR="50800" marT="25400" marB="25400" anchor="ctr">
-                    <a:lnL w="0" cap="flat" cmpd="sng" algn="ctr">
-                      <a:solidFill>
-                        <a:srgbClr val="FFFFFF"/>
+                  <a:tcPr marL="91440" marR="91440" marT="45720" marB="45720" anchor="ctr">
+                    <a:lnL w="6350" cap="flat" cmpd="sng" algn="ctr">
+                      <a:solidFill>
+                        <a:srgbClr val="E0E0E0"/>
                       </a:solidFill>
                       <a:prstDash val="solid"/>
                       <a:round/>
                       <a:headEnd type="none" w="med" len="med"/>
                       <a:tailEnd type="none" w="med" len="med"/>
                     </a:lnL>
-                    <a:lnR w="0" cap="flat" cmpd="sng" algn="ctr">
-                      <a:solidFill>
-                        <a:srgbClr val="FFFFFF"/>
+                    <a:lnR w="6350" cap="flat" cmpd="sng" algn="ctr">
+                      <a:solidFill>
+                        <a:srgbClr val="E0E0E0"/>
                       </a:solidFill>
                       <a:prstDash val="solid"/>
                       <a:round/>
                       <a:headEnd type="none" w="med" len="med"/>
                       <a:tailEnd type="none" w="med" len="med"/>
                     </a:lnR>
-                    <a:lnT w="0" cap="flat" cmpd="sng" algn="ctr">
-                      <a:solidFill>
-                        <a:srgbClr val="E8E8E8"/>
+                    <a:lnT w="6350" cap="flat" cmpd="sng" algn="ctr">
+                      <a:solidFill>
+                        <a:srgbClr val="E0E0E0"/>
                       </a:solidFill>
                       <a:prstDash val="solid"/>
                       <a:round/>
@@ -3035,13 +2948,16 @@
                     </a:lnT>
                     <a:lnB w="6350" cap="flat" cmpd="sng" algn="ctr">
                       <a:solidFill>
-                        <a:srgbClr val="E8E8E8"/>
+                        <a:srgbClr val="E0E0E0"/>
                       </a:solidFill>
                       <a:prstDash val="solid"/>
                       <a:round/>
                       <a:headEnd type="none" w="med" len="med"/>
                       <a:tailEnd type="none" w="med" len="med"/>
                     </a:lnB>
+                    <a:solidFill>
+                      <a:srgbClr val="FFFFFF"/>
+                    </a:solidFill>
                   </a:tcPr>
                 </a:tc>
                 <a:tc>
@@ -3049,49 +2965,49 @@
                     <a:bodyPr/>
                     <a:lstStyle/>
                     <a:p>
-                      <a:pPr algn="ctr" indent="0" marL="0">
-                        <a:buNone/>
-                      </a:pPr>
-                      <a:r>
-                        <a:rPr lang="en-US" sz="800" dirty="0">
-                          <a:solidFill>
-                            <a:srgbClr val="404040"/>
-                          </a:solidFill>
-                          <a:latin typeface="Calibri" pitchFamily="34" charset="0"/>
-                          <a:ea typeface="Calibri" pitchFamily="34" charset="-122"/>
-                          <a:cs typeface="Calibri" pitchFamily="34" charset="-120"/>
-                        </a:rPr>
-                        <a:t>80–100</a:t>
-                      </a:r>
-                      <a:endParaRPr lang="en-US" sz="800" dirty="0">
+                      <a:pPr indent="0" marL="0">
+                        <a:buNone/>
+                      </a:pPr>
+                      <a:r>
+                        <a:rPr lang="en-US" sz="1000" dirty="0">
+                          <a:solidFill>
+                            <a:srgbClr val="333333"/>
+                          </a:solidFill>
+                          <a:latin typeface="Calibri" pitchFamily="34" charset="0"/>
+                          <a:ea typeface="Calibri" pitchFamily="34" charset="-122"/>
+                          <a:cs typeface="Calibri" pitchFamily="34" charset="-120"/>
+                        </a:rPr>
+                        <a:t>X</a:t>
+                      </a:r>
+                      <a:endParaRPr lang="en-US" sz="1000" dirty="0">
                         <a:latin typeface="Calibri" charset="0"/>
                         <a:ea typeface="Calibri" charset="0"/>
                         <a:cs typeface="Calibri" charset="0"/>
                       </a:endParaRPr>
                     </a:p>
                   </a:txBody>
-                  <a:tcPr marL="50800" marR="50800" marT="25400" marB="25400" anchor="ctr">
-                    <a:lnL w="0" cap="flat" cmpd="sng" algn="ctr">
-                      <a:solidFill>
-                        <a:srgbClr val="FFFFFF"/>
+                  <a:tcPr marL="91440" marR="91440" marT="45720" marB="45720" anchor="ctr">
+                    <a:lnL w="6350" cap="flat" cmpd="sng" algn="ctr">
+                      <a:solidFill>
+                        <a:srgbClr val="E0E0E0"/>
                       </a:solidFill>
                       <a:prstDash val="solid"/>
                       <a:round/>
                       <a:headEnd type="none" w="med" len="med"/>
                       <a:tailEnd type="none" w="med" len="med"/>
                     </a:lnL>
-                    <a:lnR w="0" cap="flat" cmpd="sng" algn="ctr">
-                      <a:solidFill>
-                        <a:srgbClr val="FFFFFF"/>
+                    <a:lnR w="6350" cap="flat" cmpd="sng" algn="ctr">
+                      <a:solidFill>
+                        <a:srgbClr val="E0E0E0"/>
                       </a:solidFill>
                       <a:prstDash val="solid"/>
                       <a:round/>
                       <a:headEnd type="none" w="med" len="med"/>
                       <a:tailEnd type="none" w="med" len="med"/>
                     </a:lnR>
-                    <a:lnT w="0" cap="flat" cmpd="sng" algn="ctr">
-                      <a:solidFill>
-                        <a:srgbClr val="E8E8E8"/>
+                    <a:lnT w="6350" cap="flat" cmpd="sng" algn="ctr">
+                      <a:solidFill>
+                        <a:srgbClr val="E0E0E0"/>
                       </a:solidFill>
                       <a:prstDash val="solid"/>
                       <a:round/>
@@ -3100,13 +3016,16 @@
                     </a:lnT>
                     <a:lnB w="6350" cap="flat" cmpd="sng" algn="ctr">
                       <a:solidFill>
-                        <a:srgbClr val="E8E8E8"/>
+                        <a:srgbClr val="E0E0E0"/>
                       </a:solidFill>
                       <a:prstDash val="solid"/>
                       <a:round/>
                       <a:headEnd type="none" w="med" len="med"/>
                       <a:tailEnd type="none" w="med" len="med"/>
                     </a:lnB>
+                    <a:solidFill>
+                      <a:srgbClr val="EBF5FB"/>
+                    </a:solidFill>
                   </a:tcPr>
                 </a:tc>
                 <a:tc>
@@ -3114,49 +3033,49 @@
                     <a:bodyPr/>
                     <a:lstStyle/>
                     <a:p>
-                      <a:pPr algn="ctr" indent="0" marL="0">
-                        <a:buNone/>
-                      </a:pPr>
-                      <a:r>
-                        <a:rPr lang="en-US" sz="800" dirty="0">
-                          <a:solidFill>
-                            <a:srgbClr val="404040"/>
-                          </a:solidFill>
-                          <a:latin typeface="Calibri" pitchFamily="34" charset="0"/>
-                          <a:ea typeface="Calibri" pitchFamily="34" charset="-122"/>
-                          <a:cs typeface="Calibri" pitchFamily="34" charset="-120"/>
-                        </a:rPr>
-                        <a:t>200–300</a:t>
-                      </a:r>
-                      <a:endParaRPr lang="en-US" sz="800" dirty="0">
+                      <a:pPr indent="0" marL="0">
+                        <a:buNone/>
+                      </a:pPr>
+                      <a:r>
+                        <a:rPr lang="en-US" sz="1000" dirty="0">
+                          <a:solidFill>
+                            <a:srgbClr val="333333"/>
+                          </a:solidFill>
+                          <a:latin typeface="Calibri" pitchFamily="34" charset="0"/>
+                          <a:ea typeface="Calibri" pitchFamily="34" charset="-122"/>
+                          <a:cs typeface="Calibri" pitchFamily="34" charset="-120"/>
+                        </a:rPr>
+                        <a:t>✓</a:t>
+                      </a:r>
+                      <a:endParaRPr lang="en-US" sz="1000" dirty="0">
                         <a:latin typeface="Calibri" charset="0"/>
                         <a:ea typeface="Calibri" charset="0"/>
                         <a:cs typeface="Calibri" charset="0"/>
                       </a:endParaRPr>
                     </a:p>
                   </a:txBody>
-                  <a:tcPr marL="50800" marR="50800" marT="25400" marB="25400" anchor="ctr">
-                    <a:lnL w="0" cap="flat" cmpd="sng" algn="ctr">
-                      <a:solidFill>
-                        <a:srgbClr val="FFFFFF"/>
+                  <a:tcPr marL="91440" marR="91440" marT="45720" marB="45720" anchor="ctr">
+                    <a:lnL w="6350" cap="flat" cmpd="sng" algn="ctr">
+                      <a:solidFill>
+                        <a:srgbClr val="E0E0E0"/>
                       </a:solidFill>
                       <a:prstDash val="solid"/>
                       <a:round/>
                       <a:headEnd type="none" w="med" len="med"/>
                       <a:tailEnd type="none" w="med" len="med"/>
                     </a:lnL>
-                    <a:lnR w="0" cap="flat" cmpd="sng" algn="ctr">
-                      <a:solidFill>
-                        <a:srgbClr val="FFFFFF"/>
+                    <a:lnR w="6350" cap="flat" cmpd="sng" algn="ctr">
+                      <a:solidFill>
+                        <a:srgbClr val="E0E0E0"/>
                       </a:solidFill>
                       <a:prstDash val="solid"/>
                       <a:round/>
                       <a:headEnd type="none" w="med" len="med"/>
                       <a:tailEnd type="none" w="med" len="med"/>
                     </a:lnR>
-                    <a:lnT w="0" cap="flat" cmpd="sng" algn="ctr">
-                      <a:solidFill>
-                        <a:srgbClr val="E8E8E8"/>
+                    <a:lnT w="6350" cap="flat" cmpd="sng" algn="ctr">
+                      <a:solidFill>
+                        <a:srgbClr val="E0E0E0"/>
                       </a:solidFill>
                       <a:prstDash val="solid"/>
                       <a:round/>
@@ -3165,143 +3084,16 @@
                     </a:lnT>
                     <a:lnB w="6350" cap="flat" cmpd="sng" algn="ctr">
                       <a:solidFill>
-                        <a:srgbClr val="E8E8E8"/>
+                        <a:srgbClr val="E0E0E0"/>
                       </a:solidFill>
                       <a:prstDash val="solid"/>
                       <a:round/>
                       <a:headEnd type="none" w="med" len="med"/>
                       <a:tailEnd type="none" w="med" len="med"/>
                     </a:lnB>
-                  </a:tcPr>
-                </a:tc>
-                <a:tc>
-                  <a:txBody>
-                    <a:bodyPr/>
-                    <a:lstStyle/>
-                    <a:p>
-                      <a:pPr algn="ctr" indent="0" marL="0">
-                        <a:buNone/>
-                      </a:pPr>
-                      <a:r>
-                        <a:rPr lang="en-US" sz="800" dirty="0">
-                          <a:solidFill>
-                            <a:srgbClr val="404040"/>
-                          </a:solidFill>
-                          <a:latin typeface="Calibri" pitchFamily="34" charset="0"/>
-                          <a:ea typeface="Calibri" pitchFamily="34" charset="-122"/>
-                          <a:cs typeface="Calibri" pitchFamily="34" charset="-120"/>
-                        </a:rPr>
-                        <a:t>400–500</a:t>
-                      </a:r>
-                      <a:endParaRPr lang="en-US" sz="800" dirty="0">
-                        <a:latin typeface="Calibri" charset="0"/>
-                        <a:ea typeface="Calibri" charset="0"/>
-                        <a:cs typeface="Calibri" charset="0"/>
-                      </a:endParaRPr>
-                    </a:p>
-                  </a:txBody>
-                  <a:tcPr marL="50800" marR="50800" marT="25400" marB="25400" anchor="ctr">
-                    <a:lnL w="0" cap="flat" cmpd="sng" algn="ctr">
-                      <a:solidFill>
-                        <a:srgbClr val="FFFFFF"/>
-                      </a:solidFill>
-                      <a:prstDash val="solid"/>
-                      <a:round/>
-                      <a:headEnd type="none" w="med" len="med"/>
-                      <a:tailEnd type="none" w="med" len="med"/>
-                    </a:lnL>
-                    <a:lnR w="0" cap="flat" cmpd="sng" algn="ctr">
-                      <a:solidFill>
-                        <a:srgbClr val="FFFFFF"/>
-                      </a:solidFill>
-                      <a:prstDash val="solid"/>
-                      <a:round/>
-                      <a:headEnd type="none" w="med" len="med"/>
-                      <a:tailEnd type="none" w="med" len="med"/>
-                    </a:lnR>
-                    <a:lnT w="0" cap="flat" cmpd="sng" algn="ctr">
-                      <a:solidFill>
-                        <a:srgbClr val="E8E8E8"/>
-                      </a:solidFill>
-                      <a:prstDash val="solid"/>
-                      <a:round/>
-                      <a:headEnd type="none" w="med" len="med"/>
-                      <a:tailEnd type="none" w="med" len="med"/>
-                    </a:lnT>
-                    <a:lnB w="6350" cap="flat" cmpd="sng" algn="ctr">
-                      <a:solidFill>
-                        <a:srgbClr val="E8E8E8"/>
-                      </a:solidFill>
-                      <a:prstDash val="solid"/>
-                      <a:round/>
-                      <a:headEnd type="none" w="med" len="med"/>
-                      <a:tailEnd type="none" w="med" len="med"/>
-                    </a:lnB>
-                  </a:tcPr>
-                </a:tc>
-                <a:tc>
-                  <a:txBody>
-                    <a:bodyPr/>
-                    <a:lstStyle/>
-                    <a:p>
-                      <a:pPr algn="ctr" indent="0" marL="0">
-                        <a:buNone/>
-                      </a:pPr>
-                      <a:r>
-                        <a:rPr lang="en-US" sz="800" dirty="0">
-                          <a:solidFill>
-                            <a:srgbClr val="404040"/>
-                          </a:solidFill>
-                          <a:latin typeface="Calibri" pitchFamily="34" charset="0"/>
-                          <a:ea typeface="Calibri" pitchFamily="34" charset="-122"/>
-                          <a:cs typeface="Calibri" pitchFamily="34" charset="-120"/>
-                        </a:rPr>
-                        <a:t>800–1,000</a:t>
-                      </a:r>
-                      <a:endParaRPr lang="en-US" sz="800" dirty="0">
-                        <a:latin typeface="Calibri" charset="0"/>
-                        <a:ea typeface="Calibri" charset="0"/>
-                        <a:cs typeface="Calibri" charset="0"/>
-                      </a:endParaRPr>
-                    </a:p>
-                  </a:txBody>
-                  <a:tcPr marL="50800" marR="50800" marT="25400" marB="25400" anchor="ctr">
-                    <a:lnL w="0" cap="flat" cmpd="sng" algn="ctr">
-                      <a:solidFill>
-                        <a:srgbClr val="FFFFFF"/>
-                      </a:solidFill>
-                      <a:prstDash val="solid"/>
-                      <a:round/>
-                      <a:headEnd type="none" w="med" len="med"/>
-                      <a:tailEnd type="none" w="med" len="med"/>
-                    </a:lnL>
-                    <a:lnR w="0" cap="flat" cmpd="sng" algn="ctr">
-                      <a:solidFill>
-                        <a:srgbClr val="FFFFFF"/>
-                      </a:solidFill>
-                      <a:prstDash val="solid"/>
-                      <a:round/>
-                      <a:headEnd type="none" w="med" len="med"/>
-                      <a:tailEnd type="none" w="med" len="med"/>
-                    </a:lnR>
-                    <a:lnT w="0" cap="flat" cmpd="sng" algn="ctr">
-                      <a:solidFill>
-                        <a:srgbClr val="E8E8E8"/>
-                      </a:solidFill>
-                      <a:prstDash val="solid"/>
-                      <a:round/>
-                      <a:headEnd type="none" w="med" len="med"/>
-                      <a:tailEnd type="none" w="med" len="med"/>
-                    </a:lnT>
-                    <a:lnB w="6350" cap="flat" cmpd="sng" algn="ctr">
-                      <a:solidFill>
-                        <a:srgbClr val="E8E8E8"/>
-                      </a:solidFill>
-                      <a:prstDash val="solid"/>
-                      <a:round/>
-                      <a:headEnd type="none" w="med" len="med"/>
-                      <a:tailEnd type="none" w="med" len="med"/>
-                    </a:lnB>
+                    <a:solidFill>
+                      <a:srgbClr val="EAFAF1"/>
+                    </a:solidFill>
                   </a:tcPr>
                 </a:tc>
               </a:tr>
@@ -3311,14 +3103,14 @@
       </p:graphicFrame>
       <p:sp>
         <p:nvSpPr>
-          <p:cNvPr id="25" name="Text 22"/>
+          <p:cNvPr id="6" name="Text 3"/>
           <p:cNvSpPr/>
           <p:nvPr/>
         </p:nvSpPr>
         <p:spPr>
           <a:xfrm>
-            <a:off x="457200" y="4434840"/>
-            <a:ext cx="8229600" cy="228600"/>
+            <a:off x="457200" y="4526280"/>
+            <a:ext cx="7772400" cy="411480"/>
           </a:xfrm>
           <a:prstGeom prst="rect">
             <a:avLst/>
@@ -3327,22 +3119,110 @@
           <a:ln/>
         </p:spPr>
         <p:txBody>
-          <a:bodyPr wrap="square" lIns="0" tIns="0" rIns="0" bIns="0" rtlCol="0" anchor="t"/>
+          <a:bodyPr wrap="square" lIns="0" tIns="0" rIns="0" bIns="0" rtlCol="0" anchor="ctr"/>
           <a:lstStyle/>
           <a:p>
-            <a:pPr algn="l" indent="0" marL="0">
+            <a:pPr indent="0" marL="0">
               <a:buNone/>
             </a:pPr>
             <a:r>
-              <a:rPr lang="en-US" sz="700" i="1" dirty="0">
+              <a:rPr lang="en-US" sz="700" b="1" dirty="0">
                 <a:solidFill>
-                  <a:srgbClr val="999999"/>
+                  <a:srgbClr val="666666"/>
                 </a:solidFill>
                 <a:latin typeface="Calibri" pitchFamily="34" charset="0"/>
                 <a:ea typeface="Calibri" pitchFamily="34" charset="-122"/>
                 <a:cs typeface="Calibri" pitchFamily="34" charset="-120"/>
               </a:rPr>
-              <a:t>1. Capacity and cost projections based on Dutch Government targets and IEA estimates; actual figures may vary depending on policy and market conditions.</a:t>
+              <a:t>1. </a:t>
+            </a:r>
+            <a:pPr indent="0" marL="0">
+              <a:buNone/>
+            </a:pPr>
+            <a:r>
+              <a:rPr lang="en-US" sz="700" dirty="0">
+                <a:solidFill>
+                  <a:srgbClr val="666666"/>
+                </a:solidFill>
+                <a:latin typeface="Calibri" pitchFamily="34" charset="0"/>
+                <a:ea typeface="Calibri" pitchFamily="34" charset="-122"/>
+                <a:cs typeface="Calibri" pitchFamily="34" charset="-120"/>
+              </a:rPr>
+              <a:t>Process: Sulfur Removal, Synthesis Gas Production via Steam-Methane Reforming (SMR) or Auto-Thermal Reforming (ATR), CO Shift Reaction, Purification.</a:t>
+            </a:r>
+            <a:pPr indent="0" marL="0">
+              <a:buNone/>
+            </a:pPr>
+            <a:endParaRPr lang="en-US" sz="700" dirty="0"/>
+          </a:p>
+          <a:p>
+            <a:pPr indent="0" marL="0">
+              <a:buNone/>
+            </a:pPr>
+            <a:r>
+              <a:rPr lang="en-US" sz="700" b="1" dirty="0">
+                <a:solidFill>
+                  <a:srgbClr val="666666"/>
+                </a:solidFill>
+                <a:latin typeface="Calibri" pitchFamily="34" charset="0"/>
+                <a:ea typeface="Calibri" pitchFamily="34" charset="-122"/>
+                <a:cs typeface="Calibri" pitchFamily="34" charset="-120"/>
+              </a:rPr>
+              <a:t>2. </a:t>
+            </a:r>
+            <a:endParaRPr lang="en-US" sz="700" dirty="0"/>
+          </a:p>
+          <a:p>
+            <a:pPr indent="0" marL="0">
+              <a:buNone/>
+            </a:pPr>
+            <a:r>
+              <a:rPr lang="en-US" sz="700" dirty="0">
+                <a:solidFill>
+                  <a:srgbClr val="666666"/>
+                </a:solidFill>
+                <a:latin typeface="Calibri" pitchFamily="34" charset="0"/>
+                <a:ea typeface="Calibri" pitchFamily="34" charset="-122"/>
+                <a:cs typeface="Calibri" pitchFamily="34" charset="-120"/>
+              </a:rPr>
+              <a:t>In Australia, producing hydrogen from electrolyzers that run on grid electricity would lead to an emission intensity of ~40 kgCO2/kgH2.</a:t>
+            </a:r>
+            <a:pPr indent="0" marL="0">
+              <a:buNone/>
+            </a:pPr>
+            <a:endParaRPr lang="en-US" sz="700" dirty="0"/>
+          </a:p>
+          <a:p>
+            <a:pPr indent="0" marL="0">
+              <a:buNone/>
+            </a:pPr>
+            <a:r>
+              <a:rPr lang="en-US" sz="700" b="1" dirty="0">
+                <a:solidFill>
+                  <a:srgbClr val="666666"/>
+                </a:solidFill>
+                <a:latin typeface="Calibri" pitchFamily="34" charset="0"/>
+                <a:ea typeface="Calibri" pitchFamily="34" charset="-122"/>
+                <a:cs typeface="Calibri" pitchFamily="34" charset="-120"/>
+              </a:rPr>
+              <a:t>3. </a:t>
+            </a:r>
+            <a:endParaRPr lang="en-US" sz="700" dirty="0"/>
+          </a:p>
+          <a:p>
+            <a:pPr indent="0" marL="0">
+              <a:buNone/>
+            </a:pPr>
+            <a:r>
+              <a:rPr lang="en-US" sz="700" dirty="0">
+                <a:solidFill>
+                  <a:srgbClr val="666666"/>
+                </a:solidFill>
+                <a:latin typeface="Calibri" pitchFamily="34" charset="0"/>
+                <a:ea typeface="Calibri" pitchFamily="34" charset="-122"/>
+                <a:cs typeface="Calibri" pitchFamily="34" charset="-120"/>
+              </a:rPr>
+              <a:t>Especially PEM electrolyzers can be largely pre-assembled, containerized, and stacked.</a:t>
             </a:r>
             <a:endParaRPr lang="en-US" sz="700" dirty="0"/>
           </a:p>
@@ -3350,22 +3230,22 @@
       </p:sp>
       <p:sp>
         <p:nvSpPr>
-          <p:cNvPr id="26" name="Shape 23"/>
+          <p:cNvPr id="7" name="Shape 4"/>
           <p:cNvSpPr/>
           <p:nvPr/>
         </p:nvSpPr>
         <p:spPr>
           <a:xfrm>
-            <a:off x="457200" y="5257800"/>
+            <a:off x="457200" y="4892040"/>
             <a:ext cx="8229600" cy="0"/>
           </a:xfrm>
           <a:prstGeom prst="line">
             <a:avLst/>
           </a:prstGeom>
           <a:noFill/>
-          <a:ln w="9525">
+          <a:ln w="6350">
             <a:solidFill>
-              <a:srgbClr val="404040"/>
+              <a:srgbClr val="333333"/>
             </a:solidFill>
             <a:prstDash val="solid"/>
           </a:ln>
@@ -3373,14 +3253,14 @@
       </p:sp>
       <p:sp>
         <p:nvSpPr>
-          <p:cNvPr id="27" name="Text 24"/>
+          <p:cNvPr id="8" name="Text 5"/>
           <p:cNvSpPr/>
           <p:nvPr/>
         </p:nvSpPr>
         <p:spPr>
           <a:xfrm>
-            <a:off x="457200" y="5303520"/>
-            <a:ext cx="5943600" cy="228600"/>
+            <a:off x="6400800" y="4919472"/>
+            <a:ext cx="2286000" cy="182880"/>
           </a:xfrm>
           <a:prstGeom prst="rect">
             <a:avLst/>
@@ -3389,75 +3269,22 @@
           <a:ln/>
         </p:spPr>
         <p:txBody>
-          <a:bodyPr wrap="square" lIns="0" tIns="0" rIns="0" bIns="0" rtlCol="0" anchor="t"/>
-          <a:lstStyle/>
-          <a:p>
-            <a:pPr algn="l" indent="0" marL="0">
-              <a:buNone/>
-            </a:pPr>
-            <a:r>
-              <a:rPr lang="en-US" sz="700" dirty="0">
-                <a:solidFill>
-                  <a:srgbClr val="999999"/>
-                </a:solidFill>
-                <a:latin typeface="Calibri" pitchFamily="34" charset="0"/>
-                <a:ea typeface="Calibri" pitchFamily="34" charset="-122"/>
-                <a:cs typeface="Calibri" pitchFamily="34" charset="-120"/>
-              </a:rPr>
-              <a:t>Source: Dutch National Hydrogen Strategy; REPowerEU; McKinsey Energy Insights</a:t>
-            </a:r>
-            <a:endParaRPr lang="en-US" sz="700" dirty="0"/>
-          </a:p>
-        </p:txBody>
-      </p:sp>
-      <p:sp>
-        <p:nvSpPr>
-          <p:cNvPr id="28" name="Text 25"/>
-          <p:cNvSpPr/>
-          <p:nvPr/>
-        </p:nvSpPr>
-        <p:spPr>
-          <a:xfrm>
-            <a:off x="6400800" y="5303520"/>
-            <a:ext cx="2286000" cy="228600"/>
-          </a:xfrm>
-          <a:prstGeom prst="rect">
-            <a:avLst/>
-          </a:prstGeom>
-          <a:noFill/>
-          <a:ln/>
-        </p:spPr>
-        <p:txBody>
-          <a:bodyPr wrap="square" lIns="0" tIns="0" rIns="0" bIns="0" rtlCol="0" anchor="t"/>
+          <a:bodyPr wrap="square" lIns="0" tIns="0" rIns="0" bIns="0" rtlCol="0" anchor="ctr"/>
           <a:lstStyle/>
           <a:p>
             <a:pPr algn="r" indent="0" marL="0">
               <a:buNone/>
             </a:pPr>
             <a:r>
-              <a:rPr lang="en-US" sz="800" b="1" dirty="0">
+              <a:rPr lang="en-US" sz="800" dirty="0">
                 <a:solidFill>
-                  <a:srgbClr val="000000"/>
+                  <a:srgbClr val="666666"/>
                 </a:solidFill>
                 <a:latin typeface="Calibri" pitchFamily="34" charset="0"/>
                 <a:ea typeface="Calibri" pitchFamily="34" charset="-122"/>
                 <a:cs typeface="Calibri" pitchFamily="34" charset="-120"/>
               </a:rPr>
-              <a:t>McKinsey &amp; Company</a:t>
-            </a:r>
-            <a:pPr algn="r" indent="0" marL="0">
-              <a:buNone/>
-            </a:pPr>
-            <a:r>
-              <a:rPr lang="en-US" sz="800" dirty="0">
-                <a:solidFill>
-                  <a:srgbClr val="999999"/>
-                </a:solidFill>
-                <a:latin typeface="Calibri" pitchFamily="34" charset="0"/>
-                <a:ea typeface="Calibri" pitchFamily="34" charset="-122"/>
-                <a:cs typeface="Calibri" pitchFamily="34" charset="-120"/>
-              </a:rPr>
-              <a:t>   1</a:t>
+              <a:t>McKinsey &amp; Company    4</a:t>
             </a:r>
             <a:endParaRPr lang="en-US" sz="800" dirty="0"/>
           </a:p>
